--- a/docs/final_presentation.pptx
+++ b/docs/final_presentation.pptx
@@ -4,15 +4,18 @@
   <p:sldMasterIdLst>
     <p:sldMasterId id="2147483816" r:id="rId1"/>
   </p:sldMasterIdLst>
+  <p:notesMasterIdLst>
+    <p:notesMasterId r:id="rId15"/>
+  </p:notesMasterIdLst>
   <p:sldIdLst>
     <p:sldId id="256" r:id="rId2"/>
     <p:sldId id="257" r:id="rId3"/>
-    <p:sldId id="267" r:id="rId4"/>
-    <p:sldId id="268" r:id="rId5"/>
-    <p:sldId id="258" r:id="rId6"/>
-    <p:sldId id="259" r:id="rId7"/>
-    <p:sldId id="260" r:id="rId8"/>
-    <p:sldId id="261" r:id="rId9"/>
+    <p:sldId id="268" r:id="rId4"/>
+    <p:sldId id="269" r:id="rId5"/>
+    <p:sldId id="259" r:id="rId6"/>
+    <p:sldId id="267" r:id="rId7"/>
+    <p:sldId id="261" r:id="rId8"/>
+    <p:sldId id="270" r:id="rId9"/>
     <p:sldId id="262" r:id="rId10"/>
     <p:sldId id="263" r:id="rId11"/>
     <p:sldId id="264" r:id="rId12"/>
@@ -133,6 +136,623 @@
     </p:ext>
   </p:extLst>
 </p:presentation>
+</file>
+
+<file path=ppt/notesMasters/notesMaster1.xml><?xml version="1.0" encoding="utf-8"?>
+<p:notesMaster xmlns:a="http://schemas.openxmlformats.org/drawingml/2006/main" xmlns:r="http://schemas.openxmlformats.org/officeDocument/2006/relationships" xmlns:p="http://schemas.openxmlformats.org/presentationml/2006/main">
+  <p:cSld>
+    <p:bg>
+      <p:bgRef idx="1001">
+        <a:schemeClr val="bg1"/>
+      </p:bgRef>
+    </p:bg>
+    <p:spTree>
+      <p:nvGrpSpPr>
+        <p:cNvPr id="1" name=""/>
+        <p:cNvGrpSpPr/>
+        <p:nvPr/>
+      </p:nvGrpSpPr>
+      <p:grpSpPr>
+        <a:xfrm>
+          <a:off x="0" y="0"/>
+          <a:ext cx="0" cy="0"/>
+          <a:chOff x="0" y="0"/>
+          <a:chExt cx="0" cy="0"/>
+        </a:xfrm>
+      </p:grpSpPr>
+      <p:sp>
+        <p:nvSpPr>
+          <p:cNvPr id="2" name="Header Placeholder 1"/>
+          <p:cNvSpPr>
+            <a:spLocks noGrp="1"/>
+          </p:cNvSpPr>
+          <p:nvPr>
+            <p:ph type="hdr" sz="quarter"/>
+          </p:nvPr>
+        </p:nvSpPr>
+        <p:spPr>
+          <a:xfrm>
+            <a:off x="0" y="0"/>
+            <a:ext cx="2971800" cy="458788"/>
+          </a:xfrm>
+          <a:prstGeom prst="rect">
+            <a:avLst/>
+          </a:prstGeom>
+        </p:spPr>
+        <p:txBody>
+          <a:bodyPr vert="horz" lIns="91440" tIns="45720" rIns="91440" bIns="45720" rtlCol="0"/>
+          <a:lstStyle>
+            <a:lvl1pPr algn="l">
+              <a:defRPr sz="1200"/>
+            </a:lvl1pPr>
+          </a:lstStyle>
+          <a:p>
+            <a:endParaRPr lang="en-US"/>
+          </a:p>
+        </p:txBody>
+      </p:sp>
+      <p:sp>
+        <p:nvSpPr>
+          <p:cNvPr id="3" name="Date Placeholder 2"/>
+          <p:cNvSpPr>
+            <a:spLocks noGrp="1"/>
+          </p:cNvSpPr>
+          <p:nvPr>
+            <p:ph type="dt" idx="1"/>
+          </p:nvPr>
+        </p:nvSpPr>
+        <p:spPr>
+          <a:xfrm>
+            <a:off x="3884613" y="0"/>
+            <a:ext cx="2971800" cy="458788"/>
+          </a:xfrm>
+          <a:prstGeom prst="rect">
+            <a:avLst/>
+          </a:prstGeom>
+        </p:spPr>
+        <p:txBody>
+          <a:bodyPr vert="horz" lIns="91440" tIns="45720" rIns="91440" bIns="45720" rtlCol="0"/>
+          <a:lstStyle>
+            <a:lvl1pPr algn="r">
+              <a:defRPr sz="1200"/>
+            </a:lvl1pPr>
+          </a:lstStyle>
+          <a:p>
+            <a:fld id="{C7602D65-D86C-C845-B52D-B2952C166961}" type="datetimeFigureOut">
+              <a:rPr lang="en-US" smtClean="0"/>
+              <a:t>4/17/25</a:t>
+            </a:fld>
+            <a:endParaRPr lang="en-US"/>
+          </a:p>
+        </p:txBody>
+      </p:sp>
+      <p:sp>
+        <p:nvSpPr>
+          <p:cNvPr id="4" name="Slide Image Placeholder 3"/>
+          <p:cNvSpPr>
+            <a:spLocks noGrp="1" noRot="1" noChangeAspect="1"/>
+          </p:cNvSpPr>
+          <p:nvPr>
+            <p:ph type="sldImg" idx="2"/>
+          </p:nvPr>
+        </p:nvSpPr>
+        <p:spPr>
+          <a:xfrm>
+            <a:off x="685800" y="1143000"/>
+            <a:ext cx="5486400" cy="3086100"/>
+          </a:xfrm>
+          <a:prstGeom prst="rect">
+            <a:avLst/>
+          </a:prstGeom>
+          <a:noFill/>
+          <a:ln w="12700">
+            <a:solidFill>
+              <a:prstClr val="black"/>
+            </a:solidFill>
+          </a:ln>
+        </p:spPr>
+        <p:txBody>
+          <a:bodyPr vert="horz" lIns="91440" tIns="45720" rIns="91440" bIns="45720" rtlCol="0" anchor="ctr"/>
+          <a:lstStyle/>
+          <a:p>
+            <a:endParaRPr lang="en-US"/>
+          </a:p>
+        </p:txBody>
+      </p:sp>
+      <p:sp>
+        <p:nvSpPr>
+          <p:cNvPr id="5" name="Notes Placeholder 4"/>
+          <p:cNvSpPr>
+            <a:spLocks noGrp="1"/>
+          </p:cNvSpPr>
+          <p:nvPr>
+            <p:ph type="body" sz="quarter" idx="3"/>
+          </p:nvPr>
+        </p:nvSpPr>
+        <p:spPr>
+          <a:xfrm>
+            <a:off x="685800" y="4400550"/>
+            <a:ext cx="5486400" cy="3600450"/>
+          </a:xfrm>
+          <a:prstGeom prst="rect">
+            <a:avLst/>
+          </a:prstGeom>
+        </p:spPr>
+        <p:txBody>
+          <a:bodyPr vert="horz" lIns="91440" tIns="45720" rIns="91440" bIns="45720" rtlCol="0"/>
+          <a:lstStyle/>
+          <a:p>
+            <a:pPr lvl="0"/>
+            <a:r>
+              <a:rPr lang="en-US"/>
+              <a:t>Click to edit Master text styles</a:t>
+            </a:r>
+          </a:p>
+          <a:p>
+            <a:pPr lvl="1"/>
+            <a:r>
+              <a:rPr lang="en-US"/>
+              <a:t>Second level</a:t>
+            </a:r>
+          </a:p>
+          <a:p>
+            <a:pPr lvl="2"/>
+            <a:r>
+              <a:rPr lang="en-US"/>
+              <a:t>Third level</a:t>
+            </a:r>
+          </a:p>
+          <a:p>
+            <a:pPr lvl="3"/>
+            <a:r>
+              <a:rPr lang="en-US"/>
+              <a:t>Fourth level</a:t>
+            </a:r>
+          </a:p>
+          <a:p>
+            <a:pPr lvl="4"/>
+            <a:r>
+              <a:rPr lang="en-US"/>
+              <a:t>Fifth level</a:t>
+            </a:r>
+          </a:p>
+        </p:txBody>
+      </p:sp>
+      <p:sp>
+        <p:nvSpPr>
+          <p:cNvPr id="6" name="Footer Placeholder 5"/>
+          <p:cNvSpPr>
+            <a:spLocks noGrp="1"/>
+          </p:cNvSpPr>
+          <p:nvPr>
+            <p:ph type="ftr" sz="quarter" idx="4"/>
+          </p:nvPr>
+        </p:nvSpPr>
+        <p:spPr>
+          <a:xfrm>
+            <a:off x="0" y="8685213"/>
+            <a:ext cx="2971800" cy="458787"/>
+          </a:xfrm>
+          <a:prstGeom prst="rect">
+            <a:avLst/>
+          </a:prstGeom>
+        </p:spPr>
+        <p:txBody>
+          <a:bodyPr vert="horz" lIns="91440" tIns="45720" rIns="91440" bIns="45720" rtlCol="0" anchor="b"/>
+          <a:lstStyle>
+            <a:lvl1pPr algn="l">
+              <a:defRPr sz="1200"/>
+            </a:lvl1pPr>
+          </a:lstStyle>
+          <a:p>
+            <a:endParaRPr lang="en-US"/>
+          </a:p>
+        </p:txBody>
+      </p:sp>
+      <p:sp>
+        <p:nvSpPr>
+          <p:cNvPr id="7" name="Slide Number Placeholder 6"/>
+          <p:cNvSpPr>
+            <a:spLocks noGrp="1"/>
+          </p:cNvSpPr>
+          <p:nvPr>
+            <p:ph type="sldNum" sz="quarter" idx="5"/>
+          </p:nvPr>
+        </p:nvSpPr>
+        <p:spPr>
+          <a:xfrm>
+            <a:off x="3884613" y="8685213"/>
+            <a:ext cx="2971800" cy="458787"/>
+          </a:xfrm>
+          <a:prstGeom prst="rect">
+            <a:avLst/>
+          </a:prstGeom>
+        </p:spPr>
+        <p:txBody>
+          <a:bodyPr vert="horz" lIns="91440" tIns="45720" rIns="91440" bIns="45720" rtlCol="0" anchor="b"/>
+          <a:lstStyle>
+            <a:lvl1pPr algn="r">
+              <a:defRPr sz="1200"/>
+            </a:lvl1pPr>
+          </a:lstStyle>
+          <a:p>
+            <a:fld id="{40C40A70-518E-5446-BCEC-01668F022A5E}" type="slidenum">
+              <a:rPr lang="en-US" smtClean="0"/>
+              <a:t>‹#›</a:t>
+            </a:fld>
+            <a:endParaRPr lang="en-US"/>
+          </a:p>
+        </p:txBody>
+      </p:sp>
+    </p:spTree>
+    <p:extLst>
+      <p:ext uri="{BB962C8B-B14F-4D97-AF65-F5344CB8AC3E}">
+        <p14:creationId xmlns:p14="http://schemas.microsoft.com/office/powerpoint/2010/main" val="2661080007"/>
+      </p:ext>
+    </p:extLst>
+  </p:cSld>
+  <p:clrMap bg1="lt1" tx1="dk1" bg2="lt2" tx2="dk2" accent1="accent1" accent2="accent2" accent3="accent3" accent4="accent4" accent5="accent5" accent6="accent6" hlink="hlink" folHlink="folHlink"/>
+  <p:notesStyle>
+    <a:lvl1pPr marL="0" algn="l" defTabSz="914400" rtl="0" eaLnBrk="1" latinLnBrk="0" hangingPunct="1">
+      <a:defRPr sz="1200" kern="1200">
+        <a:solidFill>
+          <a:schemeClr val="tx1"/>
+        </a:solidFill>
+        <a:latin typeface="+mn-lt"/>
+        <a:ea typeface="+mn-ea"/>
+        <a:cs typeface="+mn-cs"/>
+      </a:defRPr>
+    </a:lvl1pPr>
+    <a:lvl2pPr marL="457200" algn="l" defTabSz="914400" rtl="0" eaLnBrk="1" latinLnBrk="0" hangingPunct="1">
+      <a:defRPr sz="1200" kern="1200">
+        <a:solidFill>
+          <a:schemeClr val="tx1"/>
+        </a:solidFill>
+        <a:latin typeface="+mn-lt"/>
+        <a:ea typeface="+mn-ea"/>
+        <a:cs typeface="+mn-cs"/>
+      </a:defRPr>
+    </a:lvl2pPr>
+    <a:lvl3pPr marL="914400" algn="l" defTabSz="914400" rtl="0" eaLnBrk="1" latinLnBrk="0" hangingPunct="1">
+      <a:defRPr sz="1200" kern="1200">
+        <a:solidFill>
+          <a:schemeClr val="tx1"/>
+        </a:solidFill>
+        <a:latin typeface="+mn-lt"/>
+        <a:ea typeface="+mn-ea"/>
+        <a:cs typeface="+mn-cs"/>
+      </a:defRPr>
+    </a:lvl3pPr>
+    <a:lvl4pPr marL="1371600" algn="l" defTabSz="914400" rtl="0" eaLnBrk="1" latinLnBrk="0" hangingPunct="1">
+      <a:defRPr sz="1200" kern="1200">
+        <a:solidFill>
+          <a:schemeClr val="tx1"/>
+        </a:solidFill>
+        <a:latin typeface="+mn-lt"/>
+        <a:ea typeface="+mn-ea"/>
+        <a:cs typeface="+mn-cs"/>
+      </a:defRPr>
+    </a:lvl4pPr>
+    <a:lvl5pPr marL="1828800" algn="l" defTabSz="914400" rtl="0" eaLnBrk="1" latinLnBrk="0" hangingPunct="1">
+      <a:defRPr sz="1200" kern="1200">
+        <a:solidFill>
+          <a:schemeClr val="tx1"/>
+        </a:solidFill>
+        <a:latin typeface="+mn-lt"/>
+        <a:ea typeface="+mn-ea"/>
+        <a:cs typeface="+mn-cs"/>
+      </a:defRPr>
+    </a:lvl5pPr>
+    <a:lvl6pPr marL="2286000" algn="l" defTabSz="914400" rtl="0" eaLnBrk="1" latinLnBrk="0" hangingPunct="1">
+      <a:defRPr sz="1200" kern="1200">
+        <a:solidFill>
+          <a:schemeClr val="tx1"/>
+        </a:solidFill>
+        <a:latin typeface="+mn-lt"/>
+        <a:ea typeface="+mn-ea"/>
+        <a:cs typeface="+mn-cs"/>
+      </a:defRPr>
+    </a:lvl6pPr>
+    <a:lvl7pPr marL="2743200" algn="l" defTabSz="914400" rtl="0" eaLnBrk="1" latinLnBrk="0" hangingPunct="1">
+      <a:defRPr sz="1200" kern="1200">
+        <a:solidFill>
+          <a:schemeClr val="tx1"/>
+        </a:solidFill>
+        <a:latin typeface="+mn-lt"/>
+        <a:ea typeface="+mn-ea"/>
+        <a:cs typeface="+mn-cs"/>
+      </a:defRPr>
+    </a:lvl7pPr>
+    <a:lvl8pPr marL="3200400" algn="l" defTabSz="914400" rtl="0" eaLnBrk="1" latinLnBrk="0" hangingPunct="1">
+      <a:defRPr sz="1200" kern="1200">
+        <a:solidFill>
+          <a:schemeClr val="tx1"/>
+        </a:solidFill>
+        <a:latin typeface="+mn-lt"/>
+        <a:ea typeface="+mn-ea"/>
+        <a:cs typeface="+mn-cs"/>
+      </a:defRPr>
+    </a:lvl8pPr>
+    <a:lvl9pPr marL="3657600" algn="l" defTabSz="914400" rtl="0" eaLnBrk="1" latinLnBrk="0" hangingPunct="1">
+      <a:defRPr sz="1200" kern="1200">
+        <a:solidFill>
+          <a:schemeClr val="tx1"/>
+        </a:solidFill>
+        <a:latin typeface="+mn-lt"/>
+        <a:ea typeface="+mn-ea"/>
+        <a:cs typeface="+mn-cs"/>
+      </a:defRPr>
+    </a:lvl9pPr>
+  </p:notesStyle>
+</p:notesMaster>
+</file>
+
+<file path=ppt/notesSlides/notesSlide1.xml><?xml version="1.0" encoding="utf-8"?>
+<p:notes xmlns:a="http://schemas.openxmlformats.org/drawingml/2006/main" xmlns:r="http://schemas.openxmlformats.org/officeDocument/2006/relationships" xmlns:p="http://schemas.openxmlformats.org/presentationml/2006/main">
+  <p:cSld>
+    <p:spTree>
+      <p:nvGrpSpPr>
+        <p:cNvPr id="1" name=""/>
+        <p:cNvGrpSpPr/>
+        <p:nvPr/>
+      </p:nvGrpSpPr>
+      <p:grpSpPr>
+        <a:xfrm>
+          <a:off x="0" y="0"/>
+          <a:ext cx="0" cy="0"/>
+          <a:chOff x="0" y="0"/>
+          <a:chExt cx="0" cy="0"/>
+        </a:xfrm>
+      </p:grpSpPr>
+      <p:sp>
+        <p:nvSpPr>
+          <p:cNvPr id="2" name="Slide Image Placeholder 1"/>
+          <p:cNvSpPr>
+            <a:spLocks noGrp="1" noRot="1" noChangeAspect="1"/>
+          </p:cNvSpPr>
+          <p:nvPr>
+            <p:ph type="sldImg"/>
+          </p:nvPr>
+        </p:nvSpPr>
+        <p:spPr/>
+      </p:sp>
+      <p:sp>
+        <p:nvSpPr>
+          <p:cNvPr id="3" name="Notes Placeholder 2"/>
+          <p:cNvSpPr>
+            <a:spLocks noGrp="1"/>
+          </p:cNvSpPr>
+          <p:nvPr>
+            <p:ph type="body" idx="1"/>
+          </p:nvPr>
+        </p:nvSpPr>
+        <p:spPr/>
+        <p:txBody>
+          <a:bodyPr/>
+          <a:lstStyle/>
+          <a:p>
+            <a:pPr>
+              <a:buNone/>
+            </a:pPr>
+            <a:r>
+              <a:rPr lang="en-US" b="1" dirty="0"/>
+              <a:t>Support all model architectures</a:t>
+            </a:r>
+            <a:endParaRPr lang="en-US" dirty="0"/>
+          </a:p>
+          <a:p>
+            <a:pPr>
+              <a:buNone/>
+            </a:pPr>
+            <a:r>
+              <a:rPr lang="en-US" dirty="0"/>
+              <a:t>Extend masking logic beyond BERT to decoder-only (e.g., GPT) and encoder-decoder (e.g., T5) setups to cover both inference and generation paths.</a:t>
+            </a:r>
+          </a:p>
+          <a:p>
+            <a:pPr>
+              <a:buNone/>
+            </a:pPr>
+            <a:r>
+              <a:rPr lang="en-US" b="1" dirty="0"/>
+              <a:t>Handle co-references and co-variates</a:t>
+            </a:r>
+            <a:endParaRPr lang="en-US" dirty="0"/>
+          </a:p>
+          <a:p>
+            <a:pPr>
+              <a:buNone/>
+            </a:pPr>
+            <a:r>
+              <a:rPr lang="en-US" dirty="0"/>
+              <a:t>Ensure masking tracks linked tokens like “she,” “his doctor,” or "the patient" to prevent indirect PII leakage.</a:t>
+            </a:r>
+          </a:p>
+          <a:p>
+            <a:pPr>
+              <a:buNone/>
+            </a:pPr>
+            <a:r>
+              <a:rPr lang="en-US" b="1" dirty="0"/>
+              <a:t>Unify and expand dataset annotations</a:t>
+            </a:r>
+            <a:endParaRPr lang="en-US" dirty="0"/>
+          </a:p>
+          <a:p>
+            <a:pPr>
+              <a:buNone/>
+            </a:pPr>
+            <a:r>
+              <a:rPr lang="en-US" dirty="0"/>
+              <a:t>Combine DS-NER and PII </a:t>
+            </a:r>
+            <a:r>
+              <a:rPr lang="en-US" dirty="0" err="1"/>
+              <a:t>tagsets</a:t>
+            </a:r>
+            <a:r>
+              <a:rPr lang="en-US" dirty="0"/>
+              <a:t> across domains (medical, legal, finance) and simulate real-world entity distribution via controlled injection.</a:t>
+            </a:r>
+          </a:p>
+          <a:p>
+            <a:pPr>
+              <a:buNone/>
+            </a:pPr>
+            <a:r>
+              <a:rPr lang="en-US" b="1" dirty="0"/>
+              <a:t>Explore advanced masking and redaction</a:t>
+            </a:r>
+            <a:endParaRPr lang="en-US" dirty="0"/>
+          </a:p>
+          <a:p>
+            <a:pPr>
+              <a:buNone/>
+            </a:pPr>
+            <a:r>
+              <a:rPr lang="en-US" dirty="0"/>
+              <a:t>Experiment with masking Keys vs. </a:t>
+            </a:r>
+            <a:r>
+              <a:rPr lang="en-US" dirty="0" err="1"/>
+              <a:t>Keys+Values</a:t>
+            </a:r>
+            <a:r>
+              <a:rPr lang="en-US" dirty="0"/>
+              <a:t>, and evaluate soft masking, DP-based noise, or output-time redaction for Phase II.</a:t>
+            </a:r>
+          </a:p>
+          <a:p>
+            <a:pPr>
+              <a:buNone/>
+            </a:pPr>
+            <a:r>
+              <a:rPr lang="en-US" b="1" dirty="0"/>
+              <a:t>Evolve into a foundational PII layer</a:t>
+            </a:r>
+            <a:endParaRPr lang="en-US" dirty="0"/>
+          </a:p>
+          <a:p>
+            <a:pPr>
+              <a:buNone/>
+            </a:pPr>
+            <a:r>
+              <a:rPr lang="en-US" dirty="0"/>
+              <a:t>Turn this into a model-agnostic layer that any LLM can use to be “privacy aware” by default—Phase III of the project.</a:t>
+            </a:r>
+          </a:p>
+          <a:p>
+            <a:pPr>
+              <a:buNone/>
+            </a:pPr>
+            <a:r>
+              <a:rPr lang="en-US" b="1" dirty="0"/>
+              <a:t>Build PII leakage benchmarks</a:t>
+            </a:r>
+            <a:endParaRPr lang="en-US" dirty="0"/>
+          </a:p>
+          <a:p>
+            <a:pPr>
+              <a:buNone/>
+            </a:pPr>
+            <a:r>
+              <a:rPr lang="en-US" dirty="0"/>
+              <a:t>Construct evaluation tasks that test how often models leak or infer private data when unfiltered vs. masked.</a:t>
+            </a:r>
+          </a:p>
+          <a:p>
+            <a:pPr>
+              <a:buNone/>
+            </a:pPr>
+            <a:r>
+              <a:rPr lang="en-US" b="1" dirty="0"/>
+              <a:t>Visualize attention and masking</a:t>
+            </a:r>
+            <a:endParaRPr lang="en-US" dirty="0"/>
+          </a:p>
+          <a:p>
+            <a:pPr>
+              <a:buNone/>
+            </a:pPr>
+            <a:r>
+              <a:rPr lang="en-US" dirty="0"/>
+              <a:t>Use Q-K-V attention maps to show which tokens were suppressed or highlighted under the PII-aware flow.</a:t>
+            </a:r>
+          </a:p>
+          <a:p>
+            <a:pPr>
+              <a:buNone/>
+            </a:pPr>
+            <a:r>
+              <a:rPr lang="en-US" b="1" dirty="0"/>
+              <a:t>Extend to tasks like relation/event detection</a:t>
+            </a:r>
+            <a:endParaRPr lang="en-US" dirty="0"/>
+          </a:p>
+          <a:p>
+            <a:pPr>
+              <a:buNone/>
+            </a:pPr>
+            <a:r>
+              <a:rPr lang="en-US" dirty="0"/>
+              <a:t>The masking method may also help in tasks where entity-level structure matters—who did what, when, and to whom.</a:t>
+            </a:r>
+          </a:p>
+          <a:p>
+            <a:pPr>
+              <a:buNone/>
+            </a:pPr>
+            <a:r>
+              <a:rPr lang="en-US" b="1" dirty="0"/>
+              <a:t>Prototype real-world deployment use cases</a:t>
+            </a:r>
+            <a:endParaRPr lang="en-US" dirty="0"/>
+          </a:p>
+          <a:p>
+            <a:r>
+              <a:rPr lang="en-US" dirty="0"/>
+              <a:t>Integrate into redaction-first pipelines for chatbots, summarization, or policy-aware text generation with transparency.</a:t>
+            </a:r>
+          </a:p>
+          <a:p>
+            <a:endParaRPr lang="en-US" dirty="0"/>
+          </a:p>
+        </p:txBody>
+      </p:sp>
+      <p:sp>
+        <p:nvSpPr>
+          <p:cNvPr id="4" name="Slide Number Placeholder 3"/>
+          <p:cNvSpPr>
+            <a:spLocks noGrp="1"/>
+          </p:cNvSpPr>
+          <p:nvPr>
+            <p:ph type="sldNum" sz="quarter" idx="5"/>
+          </p:nvPr>
+        </p:nvSpPr>
+        <p:spPr/>
+        <p:txBody>
+          <a:bodyPr/>
+          <a:lstStyle/>
+          <a:p>
+            <a:fld id="{40C40A70-518E-5446-BCEC-01668F022A5E}" type="slidenum">
+              <a:rPr lang="en-US" smtClean="0"/>
+              <a:t>13</a:t>
+            </a:fld>
+            <a:endParaRPr lang="en-US"/>
+          </a:p>
+        </p:txBody>
+      </p:sp>
+    </p:spTree>
+    <p:extLst>
+      <p:ext uri="{BB962C8B-B14F-4D97-AF65-F5344CB8AC3E}">
+        <p14:creationId xmlns:p14="http://schemas.microsoft.com/office/powerpoint/2010/main" val="2587010116"/>
+      </p:ext>
+    </p:extLst>
+  </p:cSld>
+  <p:clrMapOvr>
+    <a:masterClrMapping/>
+  </p:clrMapOvr>
+</p:notes>
 </file>
 
 <file path=ppt/slideLayouts/slideLayout1.xml><?xml version="1.0" encoding="utf-8"?>
@@ -3827,8 +4447,73 @@
         </p:nvSpPr>
         <p:spPr/>
         <p:txBody>
-          <a:bodyPr/>
+          <a:bodyPr>
+            <a:normAutofit lnSpcReduction="10000"/>
+          </a:bodyPr>
           <a:lstStyle/>
+          <a:p>
+            <a:r>
+              <a:rPr lang="en-US" b="1" dirty="0"/>
+              <a:t>Support all model architectures</a:t>
+            </a:r>
+            <a:endParaRPr lang="en-US" dirty="0"/>
+          </a:p>
+          <a:p>
+            <a:r>
+              <a:rPr lang="en-US" b="1" dirty="0"/>
+              <a:t>Handle co-references and co-variates</a:t>
+            </a:r>
+            <a:endParaRPr lang="en-US" dirty="0"/>
+          </a:p>
+          <a:p>
+            <a:r>
+              <a:rPr lang="en-US" b="1" dirty="0"/>
+              <a:t>Unify and expand dataset annotations</a:t>
+            </a:r>
+            <a:endParaRPr lang="en-US" dirty="0"/>
+          </a:p>
+          <a:p>
+            <a:r>
+              <a:rPr lang="en-US" b="1" dirty="0"/>
+              <a:t>Explore advanced masking and redaction</a:t>
+            </a:r>
+            <a:endParaRPr lang="en-US" dirty="0"/>
+          </a:p>
+          <a:p>
+            <a:r>
+              <a:rPr lang="en-US" b="1" dirty="0"/>
+              <a:t>Evolve into a foundational PII layer</a:t>
+            </a:r>
+            <a:endParaRPr lang="en-US" dirty="0"/>
+          </a:p>
+          <a:p>
+            <a:r>
+              <a:rPr lang="en-US" b="1" dirty="0"/>
+              <a:t>Build PII leakage benchmarks</a:t>
+            </a:r>
+            <a:endParaRPr lang="en-US" dirty="0"/>
+          </a:p>
+          <a:p>
+            <a:r>
+              <a:rPr lang="en-US" b="1" dirty="0"/>
+              <a:t>Visualize attention and masking</a:t>
+            </a:r>
+            <a:endParaRPr lang="en-US" dirty="0"/>
+          </a:p>
+          <a:p>
+            <a:r>
+              <a:rPr lang="en-US" b="1" dirty="0"/>
+              <a:t>Extend to tasks like relation/event detection</a:t>
+            </a:r>
+            <a:endParaRPr lang="en-US" dirty="0"/>
+          </a:p>
+          <a:p>
+            <a:r>
+              <a:rPr lang="en-US" b="1" dirty="0"/>
+              <a:t>Prototype real-world deployment use cases</a:t>
+            </a:r>
+            <a:endParaRPr lang="en-US" dirty="0"/>
+          </a:p>
           <a:p>
             <a:endParaRPr lang="en-US" dirty="0"/>
           </a:p>
@@ -3887,7 +4572,7 @@
           <a:p>
             <a:r>
               <a:rPr lang="en-US" dirty="0"/>
-              <a:t>Introduction</a:t>
+              <a:t>Motivation</a:t>
             </a:r>
           </a:p>
         </p:txBody>
@@ -3910,27 +4595,62 @@
         </p:nvSpPr>
         <p:spPr/>
         <p:txBody>
-          <a:bodyPr/>
+          <a:bodyPr>
+            <a:normAutofit lnSpcReduction="10000"/>
+          </a:bodyPr>
           <a:lstStyle/>
           <a:p>
-            <a:pPr>
-              <a:buFont typeface="Arial" panose="020B0604020202020204" pitchFamily="34" charset="0"/>
-              <a:buChar char="•"/>
-            </a:pPr>
+            <a:r>
+              <a:rPr lang="en-US" b="1" dirty="0"/>
+              <a:t>LLMs are increasingly deployed across sensitive domains</a:t>
+            </a:r>
             <a:r>
               <a:rPr lang="en-US" dirty="0"/>
-              <a:t>Increasing need for protecting sensitive personal information (PII) from accidental exposure</a:t>
-            </a:r>
-          </a:p>
-          <a:p>
-            <a:pPr>
-              <a:buFont typeface="Arial" panose="020B0604020202020204" pitchFamily="34" charset="0"/>
-              <a:buChar char="•"/>
-            </a:pPr>
+              <a:t> like healthcare, law, and finance—with little built-in concern for privacy.</a:t>
+            </a:r>
+          </a:p>
+          <a:p>
             <a:r>
               <a:rPr lang="en-US" dirty="0"/>
-              <a:t>Challenges in accurately detecting sensitive data in unstructured text</a:t>
-            </a:r>
+              <a:t>Existing systems </a:t>
+            </a:r>
+            <a:r>
+              <a:rPr lang="en-US" b="1" dirty="0"/>
+              <a:t>lack reliable, domain-aware privacy filters</a:t>
+            </a:r>
+            <a:r>
+              <a:rPr lang="en-US" dirty="0"/>
+              <a:t> to detect and prevent PII disclosure in model outputs.</a:t>
+            </a:r>
+          </a:p>
+          <a:p>
+            <a:r>
+              <a:rPr lang="en-US" b="1" dirty="0"/>
+              <a:t>LLMs can memorize and unintentionally leak training data</a:t>
+            </a:r>
+            <a:r>
+              <a:rPr lang="en-US" dirty="0"/>
+              <a:t>, including private or regulated information.</a:t>
+            </a:r>
+          </a:p>
+          <a:p>
+            <a:r>
+              <a:rPr lang="en-US" dirty="0"/>
+              <a:t>We need a </a:t>
+            </a:r>
+            <a:r>
+              <a:rPr lang="en-US" b="1" dirty="0"/>
+              <a:t>foundational privacy-aware layer</a:t>
+            </a:r>
+            <a:r>
+              <a:rPr lang="en-US" dirty="0"/>
+              <a:t> that can detect potential privacy violations and apply appropriate privacy protection mechanisms such as </a:t>
+            </a:r>
+            <a:r>
+              <a:rPr lang="en-US" b="1" dirty="0"/>
+              <a:t>redaction, masking, or differential privacy.</a:t>
+            </a:r>
+            <a:endParaRPr lang="en-US" u="sng" dirty="0"/>
           </a:p>
           <a:p>
             <a:endParaRPr lang="en-US" dirty="0"/>
@@ -3951,6 +4671,1788 @@
 </file>
 
 <file path=ppt/slides/slide3.xml><?xml version="1.0" encoding="utf-8"?>
+<p:sld xmlns:a="http://schemas.openxmlformats.org/drawingml/2006/main" xmlns:r="http://schemas.openxmlformats.org/officeDocument/2006/relationships" xmlns:p="http://schemas.openxmlformats.org/presentationml/2006/main">
+  <p:cSld>
+    <p:spTree>
+      <p:nvGrpSpPr>
+        <p:cNvPr id="1" name=""/>
+        <p:cNvGrpSpPr/>
+        <p:nvPr/>
+      </p:nvGrpSpPr>
+      <p:grpSpPr>
+        <a:xfrm>
+          <a:off x="0" y="0"/>
+          <a:ext cx="0" cy="0"/>
+          <a:chOff x="0" y="0"/>
+          <a:chExt cx="0" cy="0"/>
+        </a:xfrm>
+      </p:grpSpPr>
+      <p:sp>
+        <p:nvSpPr>
+          <p:cNvPr id="6" name="Title 5">
+            <a:extLst>
+              <a:ext uri="{FF2B5EF4-FFF2-40B4-BE49-F238E27FC236}">
+                <a16:creationId xmlns:a16="http://schemas.microsoft.com/office/drawing/2014/main" id="{2735078B-E733-A414-CE05-01ACB3C625ED}"/>
+              </a:ext>
+            </a:extLst>
+          </p:cNvPr>
+          <p:cNvSpPr>
+            <a:spLocks noGrp="1"/>
+          </p:cNvSpPr>
+          <p:nvPr>
+            <p:ph type="title"/>
+          </p:nvPr>
+        </p:nvSpPr>
+        <p:spPr/>
+        <p:txBody>
+          <a:bodyPr/>
+          <a:lstStyle/>
+          <a:p>
+            <a:r>
+              <a:rPr lang="en-US" dirty="0"/>
+              <a:t>Privacy Attention Mechanism</a:t>
+            </a:r>
+          </a:p>
+        </p:txBody>
+      </p:sp>
+      <p:sp>
+        <p:nvSpPr>
+          <p:cNvPr id="2" name="Content Placeholder 1">
+            <a:extLst>
+              <a:ext uri="{FF2B5EF4-FFF2-40B4-BE49-F238E27FC236}">
+                <a16:creationId xmlns:a16="http://schemas.microsoft.com/office/drawing/2014/main" id="{8094284C-719F-1C2D-E197-15EEBD10073E}"/>
+              </a:ext>
+            </a:extLst>
+          </p:cNvPr>
+          <p:cNvSpPr>
+            <a:spLocks noGrp="1"/>
+          </p:cNvSpPr>
+          <p:nvPr>
+            <p:ph idx="1"/>
+          </p:nvPr>
+        </p:nvSpPr>
+        <p:spPr/>
+        <p:txBody>
+          <a:bodyPr/>
+          <a:lstStyle/>
+          <a:p>
+            <a:pPr>
+              <a:buNone/>
+            </a:pPr>
+            <a:r>
+              <a:rPr lang="en-US" b="1" dirty="0"/>
+              <a:t>Consider this input to an LLM</a:t>
+            </a:r>
+            <a:r>
+              <a:rPr lang="en-US" dirty="0"/>
+              <a:t> —</a:t>
+            </a:r>
+          </a:p>
+          <a:p>
+            <a:r>
+              <a:rPr lang="en-US" b="1" i="1" dirty="0"/>
+              <a:t>Lionel Messi's</a:t>
+            </a:r>
+            <a:r>
+              <a:rPr lang="en-US" i="1" dirty="0"/>
+              <a:t> medical condition “torn ACL” were leaked by the clinic in </a:t>
+            </a:r>
+            <a:r>
+              <a:rPr lang="en-US" b="1" i="1" dirty="0"/>
+              <a:t>Barcelona</a:t>
+            </a:r>
+            <a:r>
+              <a:rPr lang="en-US" i="1" dirty="0"/>
+              <a:t>.</a:t>
+            </a:r>
+          </a:p>
+          <a:p>
+            <a:endParaRPr lang="en-US" dirty="0"/>
+          </a:p>
+          <a:p>
+            <a:endParaRPr lang="en-US" dirty="0"/>
+          </a:p>
+        </p:txBody>
+      </p:sp>
+      <p:graphicFrame>
+        <p:nvGraphicFramePr>
+          <p:cNvPr id="8" name="Table 7">
+            <a:extLst>
+              <a:ext uri="{FF2B5EF4-FFF2-40B4-BE49-F238E27FC236}">
+                <a16:creationId xmlns:a16="http://schemas.microsoft.com/office/drawing/2014/main" id="{E1CA2F6D-A04F-20C9-87C8-141239F74CE6}"/>
+              </a:ext>
+            </a:extLst>
+          </p:cNvPr>
+          <p:cNvGraphicFramePr>
+            <a:graphicFrameLocks noGrp="1"/>
+          </p:cNvGraphicFramePr>
+          <p:nvPr>
+            <p:extLst>
+              <p:ext uri="{D42A27DB-BD31-4B8C-83A1-F6EECF244321}">
+                <p14:modId xmlns:p14="http://schemas.microsoft.com/office/powerpoint/2010/main" val="1469009256"/>
+              </p:ext>
+            </p:extLst>
+          </p:nvPr>
+        </p:nvGraphicFramePr>
+        <p:xfrm>
+          <a:off x="1734289" y="3466096"/>
+          <a:ext cx="8127999" cy="3030397"/>
+        </p:xfrm>
+        <a:graphic>
+          <a:graphicData uri="http://schemas.openxmlformats.org/drawingml/2006/table">
+            <a:tbl>
+              <a:tblPr firstRow="1" bandRow="1">
+                <a:tableStyleId>{5C22544A-7EE6-4342-B048-85BDC9FD1C3A}</a:tableStyleId>
+              </a:tblPr>
+              <a:tblGrid>
+                <a:gridCol w="2709333">
+                  <a:extLst>
+                    <a:ext uri="{9D8B030D-6E8A-4147-A177-3AD203B41FA5}">
+                      <a16:colId xmlns:a16="http://schemas.microsoft.com/office/drawing/2014/main" val="1327998530"/>
+                    </a:ext>
+                  </a:extLst>
+                </a:gridCol>
+                <a:gridCol w="2709333">
+                  <a:extLst>
+                    <a:ext uri="{9D8B030D-6E8A-4147-A177-3AD203B41FA5}">
+                      <a16:colId xmlns:a16="http://schemas.microsoft.com/office/drawing/2014/main" val="3026332768"/>
+                    </a:ext>
+                  </a:extLst>
+                </a:gridCol>
+                <a:gridCol w="2709333">
+                  <a:extLst>
+                    <a:ext uri="{9D8B030D-6E8A-4147-A177-3AD203B41FA5}">
+                      <a16:colId xmlns:a16="http://schemas.microsoft.com/office/drawing/2014/main" val="3704085553"/>
+                    </a:ext>
+                  </a:extLst>
+                </a:gridCol>
+              </a:tblGrid>
+              <a:tr h="0">
+                <a:tc>
+                  <a:txBody>
+                    <a:bodyPr/>
+                    <a:lstStyle/>
+                    <a:p>
+                      <a:r>
+                        <a:rPr lang="en-US" dirty="0"/>
+                        <a:t>Input Token</a:t>
+                      </a:r>
+                    </a:p>
+                  </a:txBody>
+                  <a:tcPr/>
+                </a:tc>
+                <a:tc>
+                  <a:txBody>
+                    <a:bodyPr/>
+                    <a:lstStyle/>
+                    <a:p>
+                      <a:r>
+                        <a:rPr lang="en-US" dirty="0"/>
+                        <a:t>NER Tag</a:t>
+                      </a:r>
+                    </a:p>
+                  </a:txBody>
+                  <a:tcPr/>
+                </a:tc>
+                <a:tc>
+                  <a:txBody>
+                    <a:bodyPr/>
+                    <a:lstStyle/>
+                    <a:p>
+                      <a:r>
+                        <a:rPr lang="en-US" dirty="0"/>
+                        <a:t>PII  Tag</a:t>
+                      </a:r>
+                    </a:p>
+                  </a:txBody>
+                  <a:tcPr/>
+                </a:tc>
+                <a:extLst>
+                  <a:ext uri="{0D108BD9-81ED-4DB2-BD59-A6C34878D82A}">
+                    <a16:rowId xmlns:a16="http://schemas.microsoft.com/office/drawing/2014/main" val="4129428343"/>
+                  </a:ext>
+                </a:extLst>
+              </a:tr>
+              <a:tr h="425066">
+                <a:tc>
+                  <a:txBody>
+                    <a:bodyPr/>
+                    <a:lstStyle/>
+                    <a:p>
+                      <a:r>
+                        <a:rPr lang="en-US" b="1" i="1" dirty="0"/>
+                        <a:t>Lionel</a:t>
+                      </a:r>
+                      <a:endParaRPr lang="en-US" dirty="0"/>
+                    </a:p>
+                  </a:txBody>
+                  <a:tcPr/>
+                </a:tc>
+                <a:tc>
+                  <a:txBody>
+                    <a:bodyPr/>
+                    <a:lstStyle/>
+                    <a:p>
+                      <a:r>
+                        <a:rPr lang="en-US" dirty="0"/>
+                        <a:t>B-PER</a:t>
+                      </a:r>
+                    </a:p>
+                  </a:txBody>
+                  <a:tcPr/>
+                </a:tc>
+                <a:tc>
+                  <a:txBody>
+                    <a:bodyPr/>
+                    <a:lstStyle/>
+                    <a:p>
+                      <a:endParaRPr lang="en-US" dirty="0"/>
+                    </a:p>
+                  </a:txBody>
+                  <a:tcPr/>
+                </a:tc>
+                <a:extLst>
+                  <a:ext uri="{0D108BD9-81ED-4DB2-BD59-A6C34878D82A}">
+                    <a16:rowId xmlns:a16="http://schemas.microsoft.com/office/drawing/2014/main" val="4254039198"/>
+                  </a:ext>
+                </a:extLst>
+              </a:tr>
+              <a:tr h="425066">
+                <a:tc>
+                  <a:txBody>
+                    <a:bodyPr/>
+                    <a:lstStyle/>
+                    <a:p>
+                      <a:r>
+                        <a:rPr lang="en-US" b="1" i="1" dirty="0"/>
+                        <a:t>Messi</a:t>
+                      </a:r>
+                      <a:endParaRPr lang="en-US" dirty="0"/>
+                    </a:p>
+                  </a:txBody>
+                  <a:tcPr/>
+                </a:tc>
+                <a:tc>
+                  <a:txBody>
+                    <a:bodyPr/>
+                    <a:lstStyle/>
+                    <a:p>
+                      <a:r>
+                        <a:rPr lang="en-US" dirty="0"/>
+                        <a:t>I-PER</a:t>
+                      </a:r>
+                    </a:p>
+                  </a:txBody>
+                  <a:tcPr/>
+                </a:tc>
+                <a:tc>
+                  <a:txBody>
+                    <a:bodyPr/>
+                    <a:lstStyle/>
+                    <a:p>
+                      <a:endParaRPr lang="en-US"/>
+                    </a:p>
+                  </a:txBody>
+                  <a:tcPr/>
+                </a:tc>
+                <a:extLst>
+                  <a:ext uri="{0D108BD9-81ED-4DB2-BD59-A6C34878D82A}">
+                    <a16:rowId xmlns:a16="http://schemas.microsoft.com/office/drawing/2014/main" val="3932184111"/>
+                  </a:ext>
+                </a:extLst>
+              </a:tr>
+              <a:tr h="425066">
+                <a:tc>
+                  <a:txBody>
+                    <a:bodyPr/>
+                    <a:lstStyle/>
+                    <a:p>
+                      <a:r>
+                        <a:rPr lang="en-US" dirty="0"/>
+                        <a:t>medical </a:t>
+                      </a:r>
+                    </a:p>
+                  </a:txBody>
+                  <a:tcPr/>
+                </a:tc>
+                <a:tc>
+                  <a:txBody>
+                    <a:bodyPr/>
+                    <a:lstStyle/>
+                    <a:p>
+                      <a:endParaRPr lang="en-US"/>
+                    </a:p>
+                  </a:txBody>
+                  <a:tcPr/>
+                </a:tc>
+                <a:tc>
+                  <a:txBody>
+                    <a:bodyPr/>
+                    <a:lstStyle/>
+                    <a:p>
+                      <a:r>
+                        <a:rPr lang="en-US" dirty="0"/>
+                        <a:t>B-Health</a:t>
+                      </a:r>
+                    </a:p>
+                  </a:txBody>
+                  <a:tcPr/>
+                </a:tc>
+                <a:extLst>
+                  <a:ext uri="{0D108BD9-81ED-4DB2-BD59-A6C34878D82A}">
+                    <a16:rowId xmlns:a16="http://schemas.microsoft.com/office/drawing/2014/main" val="2398089264"/>
+                  </a:ext>
+                </a:extLst>
+              </a:tr>
+              <a:tr h="425066">
+                <a:tc>
+                  <a:txBody>
+                    <a:bodyPr/>
+                    <a:lstStyle/>
+                    <a:p>
+                      <a:r>
+                        <a:rPr lang="en-US" dirty="0"/>
+                        <a:t>condition</a:t>
+                      </a:r>
+                    </a:p>
+                  </a:txBody>
+                  <a:tcPr/>
+                </a:tc>
+                <a:tc>
+                  <a:txBody>
+                    <a:bodyPr/>
+                    <a:lstStyle/>
+                    <a:p>
+                      <a:endParaRPr lang="en-US"/>
+                    </a:p>
+                  </a:txBody>
+                  <a:tcPr/>
+                </a:tc>
+                <a:tc>
+                  <a:txBody>
+                    <a:bodyPr/>
+                    <a:lstStyle/>
+                    <a:p>
+                      <a:r>
+                        <a:rPr lang="en-US" dirty="0"/>
+                        <a:t>I-Health</a:t>
+                      </a:r>
+                    </a:p>
+                  </a:txBody>
+                  <a:tcPr/>
+                </a:tc>
+                <a:extLst>
+                  <a:ext uri="{0D108BD9-81ED-4DB2-BD59-A6C34878D82A}">
+                    <a16:rowId xmlns:a16="http://schemas.microsoft.com/office/drawing/2014/main" val="1870130638"/>
+                  </a:ext>
+                </a:extLst>
+              </a:tr>
+              <a:tr h="425066">
+                <a:tc>
+                  <a:txBody>
+                    <a:bodyPr/>
+                    <a:lstStyle/>
+                    <a:p>
+                      <a:r>
+                        <a:rPr lang="en-US" dirty="0"/>
+                        <a:t>torn</a:t>
+                      </a:r>
+                    </a:p>
+                  </a:txBody>
+                  <a:tcPr/>
+                </a:tc>
+                <a:tc>
+                  <a:txBody>
+                    <a:bodyPr/>
+                    <a:lstStyle/>
+                    <a:p>
+                      <a:endParaRPr lang="en-US"/>
+                    </a:p>
+                  </a:txBody>
+                  <a:tcPr/>
+                </a:tc>
+                <a:tc>
+                  <a:txBody>
+                    <a:bodyPr/>
+                    <a:lstStyle/>
+                    <a:p>
+                      <a:r>
+                        <a:rPr lang="en-US" dirty="0"/>
+                        <a:t>B-Condition</a:t>
+                      </a:r>
+                    </a:p>
+                  </a:txBody>
+                  <a:tcPr/>
+                </a:tc>
+                <a:extLst>
+                  <a:ext uri="{0D108BD9-81ED-4DB2-BD59-A6C34878D82A}">
+                    <a16:rowId xmlns:a16="http://schemas.microsoft.com/office/drawing/2014/main" val="2933112969"/>
+                  </a:ext>
+                </a:extLst>
+              </a:tr>
+              <a:tr h="539307">
+                <a:tc>
+                  <a:txBody>
+                    <a:bodyPr/>
+                    <a:lstStyle/>
+                    <a:p>
+                      <a:r>
+                        <a:rPr lang="en-US" dirty="0"/>
+                        <a:t>ACL</a:t>
+                      </a:r>
+                    </a:p>
+                  </a:txBody>
+                  <a:tcPr/>
+                </a:tc>
+                <a:tc>
+                  <a:txBody>
+                    <a:bodyPr/>
+                    <a:lstStyle/>
+                    <a:p>
+                      <a:endParaRPr lang="en-US"/>
+                    </a:p>
+                  </a:txBody>
+                  <a:tcPr/>
+                </a:tc>
+                <a:tc>
+                  <a:txBody>
+                    <a:bodyPr/>
+                    <a:lstStyle/>
+                    <a:p>
+                      <a:r>
+                        <a:rPr lang="en-US" dirty="0"/>
+                        <a:t>I-Condition</a:t>
+                      </a:r>
+                    </a:p>
+                  </a:txBody>
+                  <a:tcPr/>
+                </a:tc>
+                <a:extLst>
+                  <a:ext uri="{0D108BD9-81ED-4DB2-BD59-A6C34878D82A}">
+                    <a16:rowId xmlns:a16="http://schemas.microsoft.com/office/drawing/2014/main" val="2681633236"/>
+                  </a:ext>
+                </a:extLst>
+              </a:tr>
+            </a:tbl>
+          </a:graphicData>
+        </a:graphic>
+      </p:graphicFrame>
+    </p:spTree>
+    <p:extLst>
+      <p:ext uri="{BB962C8B-B14F-4D97-AF65-F5344CB8AC3E}">
+        <p14:creationId xmlns:p14="http://schemas.microsoft.com/office/powerpoint/2010/main" val="1038922087"/>
+      </p:ext>
+    </p:extLst>
+  </p:cSld>
+  <p:clrMapOvr>
+    <a:masterClrMapping/>
+  </p:clrMapOvr>
+  <p:timing>
+    <p:tnLst>
+      <p:par>
+        <p:cTn id="1" dur="indefinite" restart="never" nodeType="tmRoot">
+          <p:childTnLst>
+            <p:seq concurrent="1" nextAc="seek">
+              <p:cTn id="2" dur="indefinite" nodeType="mainSeq">
+                <p:childTnLst>
+                  <p:par>
+                    <p:cTn id="3" fill="hold">
+                      <p:stCondLst>
+                        <p:cond delay="indefinite"/>
+                      </p:stCondLst>
+                      <p:childTnLst>
+                        <p:par>
+                          <p:cTn id="4" fill="hold">
+                            <p:stCondLst>
+                              <p:cond delay="0"/>
+                            </p:stCondLst>
+                            <p:childTnLst>
+                              <p:par>
+                                <p:cTn id="5" presetID="2" presetClass="entr" presetSubtype="4" fill="hold" nodeType="clickEffect">
+                                  <p:stCondLst>
+                                    <p:cond delay="0"/>
+                                  </p:stCondLst>
+                                  <p:childTnLst>
+                                    <p:set>
+                                      <p:cBhvr>
+                                        <p:cTn id="6" dur="1" fill="hold">
+                                          <p:stCondLst>
+                                            <p:cond delay="0"/>
+                                          </p:stCondLst>
+                                        </p:cTn>
+                                        <p:tgtEl>
+                                          <p:spTgt spid="8"/>
+                                        </p:tgtEl>
+                                        <p:attrNameLst>
+                                          <p:attrName>style.visibility</p:attrName>
+                                        </p:attrNameLst>
+                                      </p:cBhvr>
+                                      <p:to>
+                                        <p:strVal val="visible"/>
+                                      </p:to>
+                                    </p:set>
+                                    <p:anim calcmode="lin" valueType="num">
+                                      <p:cBhvr additive="base">
+                                        <p:cTn id="7" dur="500" fill="hold"/>
+                                        <p:tgtEl>
+                                          <p:spTgt spid="8"/>
+                                        </p:tgtEl>
+                                        <p:attrNameLst>
+                                          <p:attrName>ppt_x</p:attrName>
+                                        </p:attrNameLst>
+                                      </p:cBhvr>
+                                      <p:tavLst>
+                                        <p:tav tm="0">
+                                          <p:val>
+                                            <p:strVal val="#ppt_x"/>
+                                          </p:val>
+                                        </p:tav>
+                                        <p:tav tm="100000">
+                                          <p:val>
+                                            <p:strVal val="#ppt_x"/>
+                                          </p:val>
+                                        </p:tav>
+                                      </p:tavLst>
+                                    </p:anim>
+                                    <p:anim calcmode="lin" valueType="num">
+                                      <p:cBhvr additive="base">
+                                        <p:cTn id="8" dur="500" fill="hold"/>
+                                        <p:tgtEl>
+                                          <p:spTgt spid="8"/>
+                                        </p:tgtEl>
+                                        <p:attrNameLst>
+                                          <p:attrName>ppt_y</p:attrName>
+                                        </p:attrNameLst>
+                                      </p:cBhvr>
+                                      <p:tavLst>
+                                        <p:tav tm="0">
+                                          <p:val>
+                                            <p:strVal val="1+#ppt_h/2"/>
+                                          </p:val>
+                                        </p:tav>
+                                        <p:tav tm="100000">
+                                          <p:val>
+                                            <p:strVal val="#ppt_y"/>
+                                          </p:val>
+                                        </p:tav>
+                                      </p:tavLst>
+                                    </p:anim>
+                                  </p:childTnLst>
+                                </p:cTn>
+                              </p:par>
+                            </p:childTnLst>
+                          </p:cTn>
+                        </p:par>
+                      </p:childTnLst>
+                    </p:cTn>
+                  </p:par>
+                </p:childTnLst>
+              </p:cTn>
+              <p:prevCondLst>
+                <p:cond evt="onPrev" delay="0">
+                  <p:tgtEl>
+                    <p:sldTgt/>
+                  </p:tgtEl>
+                </p:cond>
+              </p:prevCondLst>
+              <p:nextCondLst>
+                <p:cond evt="onNext" delay="0">
+                  <p:tgtEl>
+                    <p:sldTgt/>
+                  </p:tgtEl>
+                </p:cond>
+              </p:nextCondLst>
+            </p:seq>
+          </p:childTnLst>
+        </p:cTn>
+      </p:par>
+    </p:tnLst>
+  </p:timing>
+</p:sld>
+</file>
+
+<file path=ppt/slides/slide4.xml><?xml version="1.0" encoding="utf-8"?>
+<p:sld xmlns:a="http://schemas.openxmlformats.org/drawingml/2006/main" xmlns:r="http://schemas.openxmlformats.org/officeDocument/2006/relationships" xmlns:p="http://schemas.openxmlformats.org/presentationml/2006/main">
+  <p:cSld>
+    <p:spTree>
+      <p:nvGrpSpPr>
+        <p:cNvPr id="1" name="">
+          <a:extLst>
+            <a:ext uri="{FF2B5EF4-FFF2-40B4-BE49-F238E27FC236}">
+              <a16:creationId xmlns:a16="http://schemas.microsoft.com/office/drawing/2014/main" id="{AB4EA379-31CB-4E6B-CF1B-5EFD013F891A}"/>
+            </a:ext>
+          </a:extLst>
+        </p:cNvPr>
+        <p:cNvGrpSpPr/>
+        <p:nvPr/>
+      </p:nvGrpSpPr>
+      <p:grpSpPr>
+        <a:xfrm>
+          <a:off x="0" y="0"/>
+          <a:ext cx="0" cy="0"/>
+          <a:chOff x="0" y="0"/>
+          <a:chExt cx="0" cy="0"/>
+        </a:xfrm>
+      </p:grpSpPr>
+      <p:sp>
+        <p:nvSpPr>
+          <p:cNvPr id="6" name="Title 5">
+            <a:extLst>
+              <a:ext uri="{FF2B5EF4-FFF2-40B4-BE49-F238E27FC236}">
+                <a16:creationId xmlns:a16="http://schemas.microsoft.com/office/drawing/2014/main" id="{770CEDC6-884B-B71B-808F-E9BFA49C42A9}"/>
+              </a:ext>
+            </a:extLst>
+          </p:cNvPr>
+          <p:cNvSpPr>
+            <a:spLocks noGrp="1"/>
+          </p:cNvSpPr>
+          <p:nvPr>
+            <p:ph type="title"/>
+          </p:nvPr>
+        </p:nvSpPr>
+        <p:spPr/>
+        <p:txBody>
+          <a:bodyPr/>
+          <a:lstStyle/>
+          <a:p>
+            <a:r>
+              <a:rPr lang="en-US" dirty="0"/>
+              <a:t>Privacy Attention Mechanism</a:t>
+            </a:r>
+          </a:p>
+        </p:txBody>
+      </p:sp>
+      <mc:AlternateContent xmlns:mc="http://schemas.openxmlformats.org/markup-compatibility/2006">
+        <mc:Choice xmlns:a14="http://schemas.microsoft.com/office/drawing/2010/main" Requires="a14">
+          <p:sp>
+            <p:nvSpPr>
+              <p:cNvPr id="2" name="Content Placeholder 1">
+                <a:extLst>
+                  <a:ext uri="{FF2B5EF4-FFF2-40B4-BE49-F238E27FC236}">
+                    <a16:creationId xmlns:a16="http://schemas.microsoft.com/office/drawing/2014/main" id="{2D60B91A-9C6F-C7F5-F044-A483FBD22E9D}"/>
+                  </a:ext>
+                </a:extLst>
+              </p:cNvPr>
+              <p:cNvSpPr>
+                <a:spLocks noGrp="1"/>
+              </p:cNvSpPr>
+              <p:nvPr>
+                <p:ph idx="1"/>
+              </p:nvPr>
+            </p:nvSpPr>
+            <p:spPr/>
+            <p:txBody>
+              <a:bodyPr/>
+              <a:lstStyle/>
+              <a:p>
+                <a:pPr>
+                  <a:buNone/>
+                </a:pPr>
+                <a:r>
+                  <a:rPr lang="en-US" b="1" dirty="0"/>
+                  <a:t>				Attention = </a:t>
+                </a:r>
+                <a14:m>
+                  <m:oMath xmlns:m="http://schemas.openxmlformats.org/officeDocument/2006/math">
+                    <m:r>
+                      <a:rPr lang="en-US" b="1" i="1" smtClean="0">
+                        <a:latin typeface="Cambria Math" panose="02040503050406030204" pitchFamily="18" charset="0"/>
+                      </a:rPr>
+                      <m:t>𝑸</m:t>
+                    </m:r>
+                    <m:sSup>
+                      <m:sSupPr>
+                        <m:ctrlPr>
+                          <a:rPr lang="en-US" b="1" i="1" smtClean="0">
+                            <a:latin typeface="Cambria Math" panose="02040503050406030204" pitchFamily="18" charset="0"/>
+                          </a:rPr>
+                        </m:ctrlPr>
+                      </m:sSupPr>
+                      <m:e>
+                        <m:r>
+                          <a:rPr lang="en-US" b="1" i="1" smtClean="0">
+                            <a:latin typeface="Cambria Math" panose="02040503050406030204" pitchFamily="18" charset="0"/>
+                          </a:rPr>
+                          <m:t>𝑲</m:t>
+                        </m:r>
+                      </m:e>
+                      <m:sup>
+                        <m:r>
+                          <a:rPr lang="en-US" b="1" i="1" smtClean="0">
+                            <a:latin typeface="Cambria Math" panose="02040503050406030204" pitchFamily="18" charset="0"/>
+                          </a:rPr>
+                          <m:t>𝑻</m:t>
+                        </m:r>
+                      </m:sup>
+                    </m:sSup>
+                    <m:r>
+                      <a:rPr lang="en-US" b="1" i="1" smtClean="0">
+                        <a:latin typeface="Cambria Math" panose="02040503050406030204" pitchFamily="18" charset="0"/>
+                      </a:rPr>
+                      <m:t>.</m:t>
+                    </m:r>
+                    <m:r>
+                      <a:rPr lang="en-US" b="1" i="1" smtClean="0">
+                        <a:latin typeface="Cambria Math" panose="02040503050406030204" pitchFamily="18" charset="0"/>
+                      </a:rPr>
+                      <m:t>𝑽</m:t>
+                    </m:r>
+                  </m:oMath>
+                </a14:m>
+                <a:endParaRPr lang="en-US" dirty="0"/>
+              </a:p>
+              <a:p>
+                <a:endParaRPr lang="en-US" dirty="0"/>
+              </a:p>
+            </p:txBody>
+          </p:sp>
+        </mc:Choice>
+        <mc:Fallback>
+          <p:sp>
+            <p:nvSpPr>
+              <p:cNvPr id="2" name="Content Placeholder 1">
+                <a:extLst>
+                  <a:ext uri="{FF2B5EF4-FFF2-40B4-BE49-F238E27FC236}">
+                    <a16:creationId xmlns:a16="http://schemas.microsoft.com/office/drawing/2014/main" id="{2D60B91A-9C6F-C7F5-F044-A483FBD22E9D}"/>
+                  </a:ext>
+                </a:extLst>
+              </p:cNvPr>
+              <p:cNvSpPr>
+                <a:spLocks noGrp="1" noRot="1" noChangeAspect="1" noMove="1" noResize="1" noEditPoints="1" noAdjustHandles="1" noChangeArrowheads="1" noChangeShapeType="1" noTextEdit="1"/>
+              </p:cNvSpPr>
+              <p:nvPr>
+                <p:ph idx="1"/>
+              </p:nvPr>
+            </p:nvSpPr>
+            <p:spPr>
+              <a:blipFill>
+                <a:blip r:embed="rId2"/>
+                <a:stretch>
+                  <a:fillRect t="-2326"/>
+                </a:stretch>
+              </a:blipFill>
+            </p:spPr>
+            <p:txBody>
+              <a:bodyPr/>
+              <a:lstStyle/>
+              <a:p>
+                <a:r>
+                  <a:rPr lang="en-US">
+                    <a:noFill/>
+                  </a:rPr>
+                  <a:t> </a:t>
+                </a:r>
+              </a:p>
+            </p:txBody>
+          </p:sp>
+        </mc:Fallback>
+      </mc:AlternateContent>
+      <p:graphicFrame>
+        <p:nvGraphicFramePr>
+          <p:cNvPr id="8" name="Table 7">
+            <a:extLst>
+              <a:ext uri="{FF2B5EF4-FFF2-40B4-BE49-F238E27FC236}">
+                <a16:creationId xmlns:a16="http://schemas.microsoft.com/office/drawing/2014/main" id="{3704AF2B-84CF-769D-01BF-DEF7335656C4}"/>
+              </a:ext>
+            </a:extLst>
+          </p:cNvPr>
+          <p:cNvGraphicFramePr>
+            <a:graphicFrameLocks noGrp="1"/>
+          </p:cNvGraphicFramePr>
+          <p:nvPr>
+            <p:extLst>
+              <p:ext uri="{D42A27DB-BD31-4B8C-83A1-F6EECF244321}">
+                <p14:modId xmlns:p14="http://schemas.microsoft.com/office/powerpoint/2010/main" val="1922532186"/>
+              </p:ext>
+            </p:extLst>
+          </p:nvPr>
+        </p:nvGraphicFramePr>
+        <p:xfrm>
+          <a:off x="1734289" y="3466096"/>
+          <a:ext cx="8127999" cy="3030397"/>
+        </p:xfrm>
+        <a:graphic>
+          <a:graphicData uri="http://schemas.openxmlformats.org/drawingml/2006/table">
+            <a:tbl>
+              <a:tblPr firstRow="1" bandRow="1">
+                <a:tableStyleId>{5C22544A-7EE6-4342-B048-85BDC9FD1C3A}</a:tableStyleId>
+              </a:tblPr>
+              <a:tblGrid>
+                <a:gridCol w="2709333">
+                  <a:extLst>
+                    <a:ext uri="{9D8B030D-6E8A-4147-A177-3AD203B41FA5}">
+                      <a16:colId xmlns:a16="http://schemas.microsoft.com/office/drawing/2014/main" val="1327998530"/>
+                    </a:ext>
+                  </a:extLst>
+                </a:gridCol>
+                <a:gridCol w="2709333">
+                  <a:extLst>
+                    <a:ext uri="{9D8B030D-6E8A-4147-A177-3AD203B41FA5}">
+                      <a16:colId xmlns:a16="http://schemas.microsoft.com/office/drawing/2014/main" val="3026332768"/>
+                    </a:ext>
+                  </a:extLst>
+                </a:gridCol>
+                <a:gridCol w="2709333">
+                  <a:extLst>
+                    <a:ext uri="{9D8B030D-6E8A-4147-A177-3AD203B41FA5}">
+                      <a16:colId xmlns:a16="http://schemas.microsoft.com/office/drawing/2014/main" val="3704085553"/>
+                    </a:ext>
+                  </a:extLst>
+                </a:gridCol>
+              </a:tblGrid>
+              <a:tr h="0">
+                <a:tc>
+                  <a:txBody>
+                    <a:bodyPr/>
+                    <a:lstStyle/>
+                    <a:p>
+                      <a:r>
+                        <a:rPr lang="en-US" dirty="0"/>
+                        <a:t>Q</a:t>
+                      </a:r>
+                    </a:p>
+                  </a:txBody>
+                  <a:tcPr/>
+                </a:tc>
+                <a:tc>
+                  <a:txBody>
+                    <a:bodyPr/>
+                    <a:lstStyle/>
+                    <a:p>
+                      <a:r>
+                        <a:rPr lang="en-US" dirty="0"/>
+                        <a:t>K</a:t>
+                      </a:r>
+                    </a:p>
+                  </a:txBody>
+                  <a:tcPr/>
+                </a:tc>
+                <a:tc>
+                  <a:txBody>
+                    <a:bodyPr/>
+                    <a:lstStyle/>
+                    <a:p>
+                      <a:r>
+                        <a:rPr lang="en-US" dirty="0"/>
+                        <a:t>V</a:t>
+                      </a:r>
+                    </a:p>
+                  </a:txBody>
+                  <a:tcPr/>
+                </a:tc>
+                <a:extLst>
+                  <a:ext uri="{0D108BD9-81ED-4DB2-BD59-A6C34878D82A}">
+                    <a16:rowId xmlns:a16="http://schemas.microsoft.com/office/drawing/2014/main" val="4129428343"/>
+                  </a:ext>
+                </a:extLst>
+              </a:tr>
+              <a:tr h="425066">
+                <a:tc>
+                  <a:txBody>
+                    <a:bodyPr/>
+                    <a:lstStyle/>
+                    <a:p>
+                      <a:r>
+                        <a:rPr lang="en-US" b="1" i="1" dirty="0"/>
+                        <a:t>Lionel</a:t>
+                      </a:r>
+                      <a:endParaRPr lang="en-US" dirty="0"/>
+                    </a:p>
+                  </a:txBody>
+                  <a:tcPr/>
+                </a:tc>
+                <a:tc>
+                  <a:txBody>
+                    <a:bodyPr/>
+                    <a:lstStyle/>
+                    <a:p>
+                      <a:r>
+                        <a:rPr lang="en-US" dirty="0">
+                          <a:solidFill>
+                            <a:schemeClr val="bg2">
+                              <a:lumMod val="75000"/>
+                            </a:schemeClr>
+                          </a:solidFill>
+                        </a:rPr>
+                        <a:t>Lionel</a:t>
+                      </a:r>
+                    </a:p>
+                  </a:txBody>
+                  <a:tcPr/>
+                </a:tc>
+                <a:tc>
+                  <a:txBody>
+                    <a:bodyPr/>
+                    <a:lstStyle/>
+                    <a:p>
+                      <a:r>
+                        <a:rPr lang="en-US" dirty="0">
+                          <a:solidFill>
+                            <a:schemeClr val="tx1">
+                              <a:lumMod val="65000"/>
+                              <a:lumOff val="35000"/>
+                            </a:schemeClr>
+                          </a:solidFill>
+                        </a:rPr>
+                        <a:t>Lionel</a:t>
+                      </a:r>
+                    </a:p>
+                  </a:txBody>
+                  <a:tcPr/>
+                </a:tc>
+                <a:extLst>
+                  <a:ext uri="{0D108BD9-81ED-4DB2-BD59-A6C34878D82A}">
+                    <a16:rowId xmlns:a16="http://schemas.microsoft.com/office/drawing/2014/main" val="4254039198"/>
+                  </a:ext>
+                </a:extLst>
+              </a:tr>
+              <a:tr h="425066">
+                <a:tc>
+                  <a:txBody>
+                    <a:bodyPr/>
+                    <a:lstStyle/>
+                    <a:p>
+                      <a:r>
+                        <a:rPr lang="en-US" b="1" i="1" dirty="0"/>
+                        <a:t>Messi</a:t>
+                      </a:r>
+                      <a:endParaRPr lang="en-US" dirty="0"/>
+                    </a:p>
+                  </a:txBody>
+                  <a:tcPr/>
+                </a:tc>
+                <a:tc>
+                  <a:txBody>
+                    <a:bodyPr/>
+                    <a:lstStyle/>
+                    <a:p>
+                      <a:r>
+                        <a:rPr lang="en-US" dirty="0">
+                          <a:solidFill>
+                            <a:schemeClr val="bg2">
+                              <a:lumMod val="75000"/>
+                            </a:schemeClr>
+                          </a:solidFill>
+                        </a:rPr>
+                        <a:t>Messi</a:t>
+                      </a:r>
+                    </a:p>
+                  </a:txBody>
+                  <a:tcPr/>
+                </a:tc>
+                <a:tc>
+                  <a:txBody>
+                    <a:bodyPr/>
+                    <a:lstStyle/>
+                    <a:p>
+                      <a:r>
+                        <a:rPr lang="en-US" dirty="0">
+                          <a:solidFill>
+                            <a:schemeClr val="tx1">
+                              <a:lumMod val="65000"/>
+                              <a:lumOff val="35000"/>
+                            </a:schemeClr>
+                          </a:solidFill>
+                        </a:rPr>
+                        <a:t>Messi</a:t>
+                      </a:r>
+                    </a:p>
+                  </a:txBody>
+                  <a:tcPr/>
+                </a:tc>
+                <a:extLst>
+                  <a:ext uri="{0D108BD9-81ED-4DB2-BD59-A6C34878D82A}">
+                    <a16:rowId xmlns:a16="http://schemas.microsoft.com/office/drawing/2014/main" val="3932184111"/>
+                  </a:ext>
+                </a:extLst>
+              </a:tr>
+              <a:tr h="425066">
+                <a:tc>
+                  <a:txBody>
+                    <a:bodyPr/>
+                    <a:lstStyle/>
+                    <a:p>
+                      <a:r>
+                        <a:rPr lang="en-US" dirty="0">
+                          <a:solidFill>
+                            <a:schemeClr val="bg2">
+                              <a:lumMod val="75000"/>
+                            </a:schemeClr>
+                          </a:solidFill>
+                        </a:rPr>
+                        <a:t>medical</a:t>
+                      </a:r>
+                      <a:r>
+                        <a:rPr lang="en-US" dirty="0"/>
+                        <a:t> </a:t>
+                      </a:r>
+                    </a:p>
+                  </a:txBody>
+                  <a:tcPr/>
+                </a:tc>
+                <a:tc>
+                  <a:txBody>
+                    <a:bodyPr/>
+                    <a:lstStyle/>
+                    <a:p>
+                      <a:r>
+                        <a:rPr lang="en-US" dirty="0"/>
+                        <a:t>medical</a:t>
+                      </a:r>
+                    </a:p>
+                  </a:txBody>
+                  <a:tcPr/>
+                </a:tc>
+                <a:tc>
+                  <a:txBody>
+                    <a:bodyPr/>
+                    <a:lstStyle/>
+                    <a:p>
+                      <a:r>
+                        <a:rPr lang="en-US" dirty="0"/>
+                        <a:t>medical</a:t>
+                      </a:r>
+                    </a:p>
+                  </a:txBody>
+                  <a:tcPr/>
+                </a:tc>
+                <a:extLst>
+                  <a:ext uri="{0D108BD9-81ED-4DB2-BD59-A6C34878D82A}">
+                    <a16:rowId xmlns:a16="http://schemas.microsoft.com/office/drawing/2014/main" val="2398089264"/>
+                  </a:ext>
+                </a:extLst>
+              </a:tr>
+              <a:tr h="425066">
+                <a:tc>
+                  <a:txBody>
+                    <a:bodyPr/>
+                    <a:lstStyle/>
+                    <a:p>
+                      <a:r>
+                        <a:rPr lang="en-US" dirty="0">
+                          <a:solidFill>
+                            <a:schemeClr val="bg2">
+                              <a:lumMod val="75000"/>
+                            </a:schemeClr>
+                          </a:solidFill>
+                        </a:rPr>
+                        <a:t>condition</a:t>
+                      </a:r>
+                    </a:p>
+                  </a:txBody>
+                  <a:tcPr/>
+                </a:tc>
+                <a:tc>
+                  <a:txBody>
+                    <a:bodyPr/>
+                    <a:lstStyle/>
+                    <a:p>
+                      <a:r>
+                        <a:rPr lang="en-US" dirty="0"/>
+                        <a:t>condition</a:t>
+                      </a:r>
+                    </a:p>
+                  </a:txBody>
+                  <a:tcPr/>
+                </a:tc>
+                <a:tc>
+                  <a:txBody>
+                    <a:bodyPr/>
+                    <a:lstStyle/>
+                    <a:p>
+                      <a:r>
+                        <a:rPr lang="en-US" dirty="0"/>
+                        <a:t>condition</a:t>
+                      </a:r>
+                    </a:p>
+                  </a:txBody>
+                  <a:tcPr/>
+                </a:tc>
+                <a:extLst>
+                  <a:ext uri="{0D108BD9-81ED-4DB2-BD59-A6C34878D82A}">
+                    <a16:rowId xmlns:a16="http://schemas.microsoft.com/office/drawing/2014/main" val="1870130638"/>
+                  </a:ext>
+                </a:extLst>
+              </a:tr>
+              <a:tr h="425066">
+                <a:tc>
+                  <a:txBody>
+                    <a:bodyPr/>
+                    <a:lstStyle/>
+                    <a:p>
+                      <a:r>
+                        <a:rPr lang="en-US" dirty="0">
+                          <a:solidFill>
+                            <a:schemeClr val="bg2">
+                              <a:lumMod val="75000"/>
+                            </a:schemeClr>
+                          </a:solidFill>
+                        </a:rPr>
+                        <a:t>torn</a:t>
+                      </a:r>
+                    </a:p>
+                  </a:txBody>
+                  <a:tcPr/>
+                </a:tc>
+                <a:tc>
+                  <a:txBody>
+                    <a:bodyPr/>
+                    <a:lstStyle/>
+                    <a:p>
+                      <a:r>
+                        <a:rPr lang="en-US" dirty="0"/>
+                        <a:t>torn</a:t>
+                      </a:r>
+                    </a:p>
+                  </a:txBody>
+                  <a:tcPr/>
+                </a:tc>
+                <a:tc>
+                  <a:txBody>
+                    <a:bodyPr/>
+                    <a:lstStyle/>
+                    <a:p>
+                      <a:r>
+                        <a:rPr lang="en-US" dirty="0"/>
+                        <a:t>torn</a:t>
+                      </a:r>
+                    </a:p>
+                  </a:txBody>
+                  <a:tcPr/>
+                </a:tc>
+                <a:extLst>
+                  <a:ext uri="{0D108BD9-81ED-4DB2-BD59-A6C34878D82A}">
+                    <a16:rowId xmlns:a16="http://schemas.microsoft.com/office/drawing/2014/main" val="2933112969"/>
+                  </a:ext>
+                </a:extLst>
+              </a:tr>
+              <a:tr h="539307">
+                <a:tc>
+                  <a:txBody>
+                    <a:bodyPr/>
+                    <a:lstStyle/>
+                    <a:p>
+                      <a:r>
+                        <a:rPr lang="en-US" dirty="0">
+                          <a:solidFill>
+                            <a:schemeClr val="bg2">
+                              <a:lumMod val="75000"/>
+                            </a:schemeClr>
+                          </a:solidFill>
+                        </a:rPr>
+                        <a:t>ACL</a:t>
+                      </a:r>
+                    </a:p>
+                  </a:txBody>
+                  <a:tcPr/>
+                </a:tc>
+                <a:tc>
+                  <a:txBody>
+                    <a:bodyPr/>
+                    <a:lstStyle/>
+                    <a:p>
+                      <a:r>
+                        <a:rPr lang="en-US" dirty="0"/>
+                        <a:t>ACL</a:t>
+                      </a:r>
+                    </a:p>
+                  </a:txBody>
+                  <a:tcPr/>
+                </a:tc>
+                <a:tc>
+                  <a:txBody>
+                    <a:bodyPr/>
+                    <a:lstStyle/>
+                    <a:p>
+                      <a:r>
+                        <a:rPr lang="en-US" dirty="0"/>
+                        <a:t>ACL</a:t>
+                      </a:r>
+                    </a:p>
+                  </a:txBody>
+                  <a:tcPr/>
+                </a:tc>
+                <a:extLst>
+                  <a:ext uri="{0D108BD9-81ED-4DB2-BD59-A6C34878D82A}">
+                    <a16:rowId xmlns:a16="http://schemas.microsoft.com/office/drawing/2014/main" val="2681633236"/>
+                  </a:ext>
+                </a:extLst>
+              </a:tr>
+            </a:tbl>
+          </a:graphicData>
+        </a:graphic>
+      </p:graphicFrame>
+      <p:cxnSp>
+        <p:nvCxnSpPr>
+          <p:cNvPr id="4" name="Straight Arrow Connector 3">
+            <a:extLst>
+              <a:ext uri="{FF2B5EF4-FFF2-40B4-BE49-F238E27FC236}">
+                <a16:creationId xmlns:a16="http://schemas.microsoft.com/office/drawing/2014/main" id="{01896832-26F1-1E7A-C8CC-12D5B9E8A5AC}"/>
+              </a:ext>
+            </a:extLst>
+          </p:cNvPr>
+          <p:cNvCxnSpPr/>
+          <p:nvPr/>
+        </p:nvCxnSpPr>
+        <p:spPr>
+          <a:xfrm>
+            <a:off x="3381153" y="4008474"/>
+            <a:ext cx="1041991" cy="914400"/>
+          </a:xfrm>
+          <a:prstGeom prst="straightConnector1">
+            <a:avLst/>
+          </a:prstGeom>
+          <a:ln w="25400">
+            <a:tailEnd type="arrow" w="lg" len="sm"/>
+          </a:ln>
+        </p:spPr>
+        <p:style>
+          <a:lnRef idx="2">
+            <a:schemeClr val="accent1"/>
+          </a:lnRef>
+          <a:fillRef idx="0">
+            <a:schemeClr val="accent1"/>
+          </a:fillRef>
+          <a:effectRef idx="1">
+            <a:schemeClr val="accent1"/>
+          </a:effectRef>
+          <a:fontRef idx="minor">
+            <a:schemeClr val="tx1"/>
+          </a:fontRef>
+        </p:style>
+      </p:cxnSp>
+      <p:cxnSp>
+        <p:nvCxnSpPr>
+          <p:cNvPr id="5" name="Straight Arrow Connector 4">
+            <a:extLst>
+              <a:ext uri="{FF2B5EF4-FFF2-40B4-BE49-F238E27FC236}">
+                <a16:creationId xmlns:a16="http://schemas.microsoft.com/office/drawing/2014/main" id="{A51893E5-D775-A25C-B1F9-4C564F04E570}"/>
+              </a:ext>
+            </a:extLst>
+          </p:cNvPr>
+          <p:cNvCxnSpPr>
+            <a:cxnSpLocks/>
+          </p:cNvCxnSpPr>
+          <p:nvPr/>
+        </p:nvCxnSpPr>
+        <p:spPr>
+          <a:xfrm>
+            <a:off x="3396343" y="4023360"/>
+            <a:ext cx="1005840" cy="1293223"/>
+          </a:xfrm>
+          <a:prstGeom prst="straightConnector1">
+            <a:avLst/>
+          </a:prstGeom>
+          <a:ln w="25400">
+            <a:tailEnd type="arrow" w="lg" len="sm"/>
+          </a:ln>
+        </p:spPr>
+        <p:style>
+          <a:lnRef idx="2">
+            <a:schemeClr val="accent1"/>
+          </a:lnRef>
+          <a:fillRef idx="0">
+            <a:schemeClr val="accent1"/>
+          </a:fillRef>
+          <a:effectRef idx="1">
+            <a:schemeClr val="accent1"/>
+          </a:effectRef>
+          <a:fontRef idx="minor">
+            <a:schemeClr val="tx1"/>
+          </a:fontRef>
+        </p:style>
+      </p:cxnSp>
+      <p:cxnSp>
+        <p:nvCxnSpPr>
+          <p:cNvPr id="10" name="Straight Arrow Connector 9">
+            <a:extLst>
+              <a:ext uri="{FF2B5EF4-FFF2-40B4-BE49-F238E27FC236}">
+                <a16:creationId xmlns:a16="http://schemas.microsoft.com/office/drawing/2014/main" id="{BE116A3C-A4B7-0C35-0AC1-27E6DBCF20D5}"/>
+              </a:ext>
+            </a:extLst>
+          </p:cNvPr>
+          <p:cNvCxnSpPr>
+            <a:cxnSpLocks/>
+          </p:cNvCxnSpPr>
+          <p:nvPr/>
+        </p:nvCxnSpPr>
+        <p:spPr>
+          <a:xfrm>
+            <a:off x="3409406" y="4010297"/>
+            <a:ext cx="979714" cy="1711234"/>
+          </a:xfrm>
+          <a:prstGeom prst="straightConnector1">
+            <a:avLst/>
+          </a:prstGeom>
+          <a:ln w="25400">
+            <a:tailEnd type="arrow" w="lg" len="sm"/>
+          </a:ln>
+        </p:spPr>
+        <p:style>
+          <a:lnRef idx="2">
+            <a:schemeClr val="accent1"/>
+          </a:lnRef>
+          <a:fillRef idx="0">
+            <a:schemeClr val="accent1"/>
+          </a:fillRef>
+          <a:effectRef idx="1">
+            <a:schemeClr val="accent1"/>
+          </a:effectRef>
+          <a:fontRef idx="minor">
+            <a:schemeClr val="tx1"/>
+          </a:fontRef>
+        </p:style>
+      </p:cxnSp>
+      <p:cxnSp>
+        <p:nvCxnSpPr>
+          <p:cNvPr id="13" name="Straight Arrow Connector 12">
+            <a:extLst>
+              <a:ext uri="{FF2B5EF4-FFF2-40B4-BE49-F238E27FC236}">
+                <a16:creationId xmlns:a16="http://schemas.microsoft.com/office/drawing/2014/main" id="{5AE5DFDF-84BA-CF6F-7796-89D5CAB0CBEB}"/>
+              </a:ext>
+            </a:extLst>
+          </p:cNvPr>
+          <p:cNvCxnSpPr>
+            <a:cxnSpLocks/>
+          </p:cNvCxnSpPr>
+          <p:nvPr/>
+        </p:nvCxnSpPr>
+        <p:spPr>
+          <a:xfrm>
+            <a:off x="3422469" y="4036423"/>
+            <a:ext cx="979714" cy="2090057"/>
+          </a:xfrm>
+          <a:prstGeom prst="straightConnector1">
+            <a:avLst/>
+          </a:prstGeom>
+          <a:ln w="25400">
+            <a:tailEnd type="arrow" w="lg" len="sm"/>
+          </a:ln>
+        </p:spPr>
+        <p:style>
+          <a:lnRef idx="2">
+            <a:schemeClr val="accent1"/>
+          </a:lnRef>
+          <a:fillRef idx="0">
+            <a:schemeClr val="accent1"/>
+          </a:fillRef>
+          <a:effectRef idx="1">
+            <a:schemeClr val="accent1"/>
+          </a:effectRef>
+          <a:fontRef idx="minor">
+            <a:schemeClr val="tx1"/>
+          </a:fontRef>
+        </p:style>
+      </p:cxnSp>
+    </p:spTree>
+    <p:extLst>
+      <p:ext uri="{BB962C8B-B14F-4D97-AF65-F5344CB8AC3E}">
+        <p14:creationId xmlns:p14="http://schemas.microsoft.com/office/powerpoint/2010/main" val="406512517"/>
+      </p:ext>
+    </p:extLst>
+  </p:cSld>
+  <p:clrMapOvr>
+    <a:masterClrMapping/>
+  </p:clrMapOvr>
+  <p:timing>
+    <p:tnLst>
+      <p:par>
+        <p:cTn id="1" dur="indefinite" restart="never" nodeType="tmRoot">
+          <p:childTnLst>
+            <p:seq concurrent="1" nextAc="seek">
+              <p:cTn id="2" dur="indefinite" nodeType="mainSeq">
+                <p:childTnLst>
+                  <p:par>
+                    <p:cTn id="3" fill="hold">
+                      <p:stCondLst>
+                        <p:cond delay="indefinite"/>
+                      </p:stCondLst>
+                      <p:childTnLst>
+                        <p:par>
+                          <p:cTn id="4" fill="hold">
+                            <p:stCondLst>
+                              <p:cond delay="0"/>
+                            </p:stCondLst>
+                            <p:childTnLst>
+                              <p:par>
+                                <p:cTn id="5" presetID="2" presetClass="entr" presetSubtype="4" fill="hold" nodeType="clickEffect">
+                                  <p:stCondLst>
+                                    <p:cond delay="0"/>
+                                  </p:stCondLst>
+                                  <p:childTnLst>
+                                    <p:set>
+                                      <p:cBhvr>
+                                        <p:cTn id="6" dur="1" fill="hold">
+                                          <p:stCondLst>
+                                            <p:cond delay="0"/>
+                                          </p:stCondLst>
+                                        </p:cTn>
+                                        <p:tgtEl>
+                                          <p:spTgt spid="8"/>
+                                        </p:tgtEl>
+                                        <p:attrNameLst>
+                                          <p:attrName>style.visibility</p:attrName>
+                                        </p:attrNameLst>
+                                      </p:cBhvr>
+                                      <p:to>
+                                        <p:strVal val="visible"/>
+                                      </p:to>
+                                    </p:set>
+                                    <p:anim calcmode="lin" valueType="num">
+                                      <p:cBhvr additive="base">
+                                        <p:cTn id="7" dur="500" fill="hold"/>
+                                        <p:tgtEl>
+                                          <p:spTgt spid="8"/>
+                                        </p:tgtEl>
+                                        <p:attrNameLst>
+                                          <p:attrName>ppt_x</p:attrName>
+                                        </p:attrNameLst>
+                                      </p:cBhvr>
+                                      <p:tavLst>
+                                        <p:tav tm="0">
+                                          <p:val>
+                                            <p:strVal val="#ppt_x"/>
+                                          </p:val>
+                                        </p:tav>
+                                        <p:tav tm="100000">
+                                          <p:val>
+                                            <p:strVal val="#ppt_x"/>
+                                          </p:val>
+                                        </p:tav>
+                                      </p:tavLst>
+                                    </p:anim>
+                                    <p:anim calcmode="lin" valueType="num">
+                                      <p:cBhvr additive="base">
+                                        <p:cTn id="8" dur="500" fill="hold"/>
+                                        <p:tgtEl>
+                                          <p:spTgt spid="8"/>
+                                        </p:tgtEl>
+                                        <p:attrNameLst>
+                                          <p:attrName>ppt_y</p:attrName>
+                                        </p:attrNameLst>
+                                      </p:cBhvr>
+                                      <p:tavLst>
+                                        <p:tav tm="0">
+                                          <p:val>
+                                            <p:strVal val="1+#ppt_h/2"/>
+                                          </p:val>
+                                        </p:tav>
+                                        <p:tav tm="100000">
+                                          <p:val>
+                                            <p:strVal val="#ppt_y"/>
+                                          </p:val>
+                                        </p:tav>
+                                      </p:tavLst>
+                                    </p:anim>
+                                  </p:childTnLst>
+                                </p:cTn>
+                              </p:par>
+                            </p:childTnLst>
+                          </p:cTn>
+                        </p:par>
+                      </p:childTnLst>
+                    </p:cTn>
+                  </p:par>
+                  <p:par>
+                    <p:cTn id="9" fill="hold">
+                      <p:stCondLst>
+                        <p:cond delay="indefinite"/>
+                      </p:stCondLst>
+                      <p:childTnLst>
+                        <p:par>
+                          <p:cTn id="10" fill="hold">
+                            <p:stCondLst>
+                              <p:cond delay="0"/>
+                            </p:stCondLst>
+                            <p:childTnLst>
+                              <p:par>
+                                <p:cTn id="11" presetID="1" presetClass="entr" presetSubtype="0" fill="hold" nodeType="clickEffect">
+                                  <p:stCondLst>
+                                    <p:cond delay="0"/>
+                                  </p:stCondLst>
+                                  <p:childTnLst>
+                                    <p:set>
+                                      <p:cBhvr>
+                                        <p:cTn id="12" dur="1" fill="hold">
+                                          <p:stCondLst>
+                                            <p:cond delay="0"/>
+                                          </p:stCondLst>
+                                        </p:cTn>
+                                        <p:tgtEl>
+                                          <p:spTgt spid="4"/>
+                                        </p:tgtEl>
+                                        <p:attrNameLst>
+                                          <p:attrName>style.visibility</p:attrName>
+                                        </p:attrNameLst>
+                                      </p:cBhvr>
+                                      <p:to>
+                                        <p:strVal val="visible"/>
+                                      </p:to>
+                                    </p:set>
+                                  </p:childTnLst>
+                                </p:cTn>
+                              </p:par>
+                              <p:par>
+                                <p:cTn id="13" presetID="1" presetClass="entr" presetSubtype="0" fill="hold" nodeType="withEffect">
+                                  <p:stCondLst>
+                                    <p:cond delay="0"/>
+                                  </p:stCondLst>
+                                  <p:childTnLst>
+                                    <p:set>
+                                      <p:cBhvr>
+                                        <p:cTn id="14" dur="1" fill="hold">
+                                          <p:stCondLst>
+                                            <p:cond delay="0"/>
+                                          </p:stCondLst>
+                                        </p:cTn>
+                                        <p:tgtEl>
+                                          <p:spTgt spid="5"/>
+                                        </p:tgtEl>
+                                        <p:attrNameLst>
+                                          <p:attrName>style.visibility</p:attrName>
+                                        </p:attrNameLst>
+                                      </p:cBhvr>
+                                      <p:to>
+                                        <p:strVal val="visible"/>
+                                      </p:to>
+                                    </p:set>
+                                  </p:childTnLst>
+                                </p:cTn>
+                              </p:par>
+                              <p:par>
+                                <p:cTn id="15" presetID="1" presetClass="entr" presetSubtype="0" fill="hold" nodeType="withEffect">
+                                  <p:stCondLst>
+                                    <p:cond delay="0"/>
+                                  </p:stCondLst>
+                                  <p:childTnLst>
+                                    <p:set>
+                                      <p:cBhvr>
+                                        <p:cTn id="16" dur="1" fill="hold">
+                                          <p:stCondLst>
+                                            <p:cond delay="0"/>
+                                          </p:stCondLst>
+                                        </p:cTn>
+                                        <p:tgtEl>
+                                          <p:spTgt spid="10"/>
+                                        </p:tgtEl>
+                                        <p:attrNameLst>
+                                          <p:attrName>style.visibility</p:attrName>
+                                        </p:attrNameLst>
+                                      </p:cBhvr>
+                                      <p:to>
+                                        <p:strVal val="visible"/>
+                                      </p:to>
+                                    </p:set>
+                                  </p:childTnLst>
+                                </p:cTn>
+                              </p:par>
+                              <p:par>
+                                <p:cTn id="17" presetID="1" presetClass="entr" presetSubtype="0" fill="hold" nodeType="withEffect">
+                                  <p:stCondLst>
+                                    <p:cond delay="0"/>
+                                  </p:stCondLst>
+                                  <p:childTnLst>
+                                    <p:set>
+                                      <p:cBhvr>
+                                        <p:cTn id="18" dur="1" fill="hold">
+                                          <p:stCondLst>
+                                            <p:cond delay="0"/>
+                                          </p:stCondLst>
+                                        </p:cTn>
+                                        <p:tgtEl>
+                                          <p:spTgt spid="13"/>
+                                        </p:tgtEl>
+                                        <p:attrNameLst>
+                                          <p:attrName>style.visibility</p:attrName>
+                                        </p:attrNameLst>
+                                      </p:cBhvr>
+                                      <p:to>
+                                        <p:strVal val="visible"/>
+                                      </p:to>
+                                    </p:set>
+                                  </p:childTnLst>
+                                </p:cTn>
+                              </p:par>
+                            </p:childTnLst>
+                          </p:cTn>
+                        </p:par>
+                      </p:childTnLst>
+                    </p:cTn>
+                  </p:par>
+                </p:childTnLst>
+              </p:cTn>
+              <p:prevCondLst>
+                <p:cond evt="onPrev" delay="0">
+                  <p:tgtEl>
+                    <p:sldTgt/>
+                  </p:tgtEl>
+                </p:cond>
+              </p:prevCondLst>
+              <p:nextCondLst>
+                <p:cond evt="onNext" delay="0">
+                  <p:tgtEl>
+                    <p:sldTgt/>
+                  </p:tgtEl>
+                </p:cond>
+              </p:nextCondLst>
+            </p:seq>
+          </p:childTnLst>
+        </p:cTn>
+      </p:par>
+    </p:tnLst>
+  </p:timing>
+</p:sld>
+</file>
+
+<file path=ppt/slides/slide5.xml><?xml version="1.0" encoding="utf-8"?>
+<p:sld xmlns:a="http://schemas.openxmlformats.org/drawingml/2006/main" xmlns:r="http://schemas.openxmlformats.org/officeDocument/2006/relationships" xmlns:p="http://schemas.openxmlformats.org/presentationml/2006/main">
+  <p:cSld>
+    <p:spTree>
+      <p:nvGrpSpPr>
+        <p:cNvPr id="1" name=""/>
+        <p:cNvGrpSpPr/>
+        <p:nvPr/>
+      </p:nvGrpSpPr>
+      <p:grpSpPr>
+        <a:xfrm>
+          <a:off x="0" y="0"/>
+          <a:ext cx="0" cy="0"/>
+          <a:chOff x="0" y="0"/>
+          <a:chExt cx="0" cy="0"/>
+        </a:xfrm>
+      </p:grpSpPr>
+      <p:sp>
+        <p:nvSpPr>
+          <p:cNvPr id="2" name="Title 1">
+            <a:extLst>
+              <a:ext uri="{FF2B5EF4-FFF2-40B4-BE49-F238E27FC236}">
+                <a16:creationId xmlns:a16="http://schemas.microsoft.com/office/drawing/2014/main" id="{AEBA3717-E326-8675-CB66-9FD419BD7A21}"/>
+              </a:ext>
+            </a:extLst>
+          </p:cNvPr>
+          <p:cNvSpPr>
+            <a:spLocks noGrp="1"/>
+          </p:cNvSpPr>
+          <p:nvPr>
+            <p:ph type="title"/>
+          </p:nvPr>
+        </p:nvSpPr>
+        <p:spPr/>
+        <p:txBody>
+          <a:bodyPr/>
+          <a:lstStyle/>
+          <a:p>
+            <a:r>
+              <a:rPr lang="en-US" dirty="0"/>
+              <a:t>Model Architecture</a:t>
+            </a:r>
+          </a:p>
+        </p:txBody>
+      </p:sp>
+      <p:sp>
+        <p:nvSpPr>
+          <p:cNvPr id="3" name="Content Placeholder 2">
+            <a:extLst>
+              <a:ext uri="{FF2B5EF4-FFF2-40B4-BE49-F238E27FC236}">
+                <a16:creationId xmlns:a16="http://schemas.microsoft.com/office/drawing/2014/main" id="{97CE80F4-C228-1930-FE7F-F71A9981104E}"/>
+              </a:ext>
+            </a:extLst>
+          </p:cNvPr>
+          <p:cNvSpPr>
+            <a:spLocks noGrp="1"/>
+          </p:cNvSpPr>
+          <p:nvPr>
+            <p:ph sz="half" idx="1"/>
+          </p:nvPr>
+        </p:nvSpPr>
+        <p:spPr/>
+        <p:txBody>
+          <a:bodyPr/>
+          <a:lstStyle/>
+          <a:p>
+            <a:pPr>
+              <a:buFont typeface="Arial" panose="020B0604020202020204" pitchFamily="34" charset="0"/>
+              <a:buChar char="•"/>
+            </a:pPr>
+            <a:r>
+              <a:rPr lang="en-US" dirty="0"/>
+              <a:t>Foundational Model for text embeddings</a:t>
+            </a:r>
+          </a:p>
+          <a:p>
+            <a:pPr>
+              <a:buFont typeface="Arial" panose="020B0604020202020204" pitchFamily="34" charset="0"/>
+              <a:buChar char="•"/>
+            </a:pPr>
+            <a:r>
+              <a:rPr lang="en-US" dirty="0"/>
+              <a:t>Separate NER heads for Personal and PII entities</a:t>
+            </a:r>
+          </a:p>
+          <a:p>
+            <a:pPr>
+              <a:buFont typeface="Arial" panose="020B0604020202020204" pitchFamily="34" charset="0"/>
+              <a:buChar char="•"/>
+            </a:pPr>
+            <a:r>
+              <a:rPr lang="en-US" dirty="0"/>
+              <a:t>Cross Attention linking Personal NER (queries) and PII NER (keys, values)</a:t>
+            </a:r>
+          </a:p>
+          <a:p>
+            <a:pPr>
+              <a:buFont typeface="Arial" panose="020B0604020202020204" pitchFamily="34" charset="0"/>
+              <a:buChar char="•"/>
+            </a:pPr>
+            <a:r>
+              <a:rPr lang="en-US" dirty="0"/>
+              <a:t>Final classifier layer</a:t>
+            </a:r>
+          </a:p>
+          <a:p>
+            <a:endParaRPr lang="en-US" dirty="0"/>
+          </a:p>
+        </p:txBody>
+      </p:sp>
+      <p:sp>
+        <p:nvSpPr>
+          <p:cNvPr id="4" name="Content Placeholder 3">
+            <a:extLst>
+              <a:ext uri="{FF2B5EF4-FFF2-40B4-BE49-F238E27FC236}">
+                <a16:creationId xmlns:a16="http://schemas.microsoft.com/office/drawing/2014/main" id="{A6D7E7B7-5428-5BA1-2EE9-F9D4539B986E}"/>
+              </a:ext>
+            </a:extLst>
+          </p:cNvPr>
+          <p:cNvSpPr>
+            <a:spLocks noGrp="1"/>
+          </p:cNvSpPr>
+          <p:nvPr>
+            <p:ph sz="half" idx="2"/>
+          </p:nvPr>
+        </p:nvSpPr>
+        <p:spPr/>
+        <p:txBody>
+          <a:bodyPr/>
+          <a:lstStyle/>
+          <a:p>
+            <a:endParaRPr lang="en-US"/>
+          </a:p>
+        </p:txBody>
+      </p:sp>
+    </p:spTree>
+    <p:extLst>
+      <p:ext uri="{BB962C8B-B14F-4D97-AF65-F5344CB8AC3E}">
+        <p14:creationId xmlns:p14="http://schemas.microsoft.com/office/powerpoint/2010/main" val="2528871441"/>
+      </p:ext>
+    </p:extLst>
+  </p:cSld>
+  <p:clrMapOvr>
+    <a:masterClrMapping/>
+  </p:clrMapOvr>
+</p:sld>
+</file>
+
+<file path=ppt/slides/slide6.xml><?xml version="1.0" encoding="utf-8"?>
 <p:sld xmlns:a="http://schemas.openxmlformats.org/drawingml/2006/main" xmlns:r="http://schemas.openxmlformats.org/officeDocument/2006/relationships" xmlns:p="http://schemas.openxmlformats.org/presentationml/2006/main">
   <p:cSld>
     <p:spTree>
@@ -5555,391 +8057,6 @@
 </p:sld>
 </file>
 
-<file path=ppt/slides/slide4.xml><?xml version="1.0" encoding="utf-8"?>
-<p:sld xmlns:a="http://schemas.openxmlformats.org/drawingml/2006/main" xmlns:r="http://schemas.openxmlformats.org/officeDocument/2006/relationships" xmlns:p="http://schemas.openxmlformats.org/presentationml/2006/main">
-  <p:cSld>
-    <p:spTree>
-      <p:nvGrpSpPr>
-        <p:cNvPr id="1" name=""/>
-        <p:cNvGrpSpPr/>
-        <p:nvPr/>
-      </p:nvGrpSpPr>
-      <p:grpSpPr>
-        <a:xfrm>
-          <a:off x="0" y="0"/>
-          <a:ext cx="0" cy="0"/>
-          <a:chOff x="0" y="0"/>
-          <a:chExt cx="0" cy="0"/>
-        </a:xfrm>
-      </p:grpSpPr>
-      <p:pic>
-        <p:nvPicPr>
-          <p:cNvPr id="3" name="Picture 2" descr="A black text on a white background&#10;&#10;AI-generated content may be incorrect.">
-            <a:extLst>
-              <a:ext uri="{FF2B5EF4-FFF2-40B4-BE49-F238E27FC236}">
-                <a16:creationId xmlns:a16="http://schemas.microsoft.com/office/drawing/2014/main" id="{48AF4356-C2F7-61A4-660A-90DFABC5052F}"/>
-              </a:ext>
-            </a:extLst>
-          </p:cNvPr>
-          <p:cNvPicPr>
-            <a:picLocks noChangeAspect="1"/>
-          </p:cNvPicPr>
-          <p:nvPr/>
-        </p:nvPicPr>
-        <p:blipFill>
-          <a:blip r:embed="rId2"/>
-          <a:stretch>
-            <a:fillRect/>
-          </a:stretch>
-        </p:blipFill>
-        <p:spPr>
-          <a:xfrm>
-            <a:off x="1406610" y="2524039"/>
-            <a:ext cx="7772400" cy="1420394"/>
-          </a:xfrm>
-          <a:prstGeom prst="rect">
-            <a:avLst/>
-          </a:prstGeom>
-        </p:spPr>
-      </p:pic>
-      <p:pic>
-        <p:nvPicPr>
-          <p:cNvPr id="5" name="Picture 4" descr="A mathematical equation with black text&#10;&#10;AI-generated content may be incorrect.">
-            <a:extLst>
-              <a:ext uri="{FF2B5EF4-FFF2-40B4-BE49-F238E27FC236}">
-                <a16:creationId xmlns:a16="http://schemas.microsoft.com/office/drawing/2014/main" id="{44E06A03-7021-3D56-9E8D-79B6CD4BE44C}"/>
-              </a:ext>
-            </a:extLst>
-          </p:cNvPr>
-          <p:cNvPicPr>
-            <a:picLocks noChangeAspect="1"/>
-          </p:cNvPicPr>
-          <p:nvPr/>
-        </p:nvPicPr>
-        <p:blipFill>
-          <a:blip r:embed="rId3"/>
-          <a:stretch>
-            <a:fillRect/>
-          </a:stretch>
-        </p:blipFill>
-        <p:spPr>
-          <a:xfrm>
-            <a:off x="2469292" y="3870925"/>
-            <a:ext cx="7772400" cy="1420394"/>
-          </a:xfrm>
-          <a:prstGeom prst="rect">
-            <a:avLst/>
-          </a:prstGeom>
-        </p:spPr>
-      </p:pic>
-      <p:sp>
-        <p:nvSpPr>
-          <p:cNvPr id="6" name="Title 5">
-            <a:extLst>
-              <a:ext uri="{FF2B5EF4-FFF2-40B4-BE49-F238E27FC236}">
-                <a16:creationId xmlns:a16="http://schemas.microsoft.com/office/drawing/2014/main" id="{2735078B-E733-A414-CE05-01ACB3C625ED}"/>
-              </a:ext>
-            </a:extLst>
-          </p:cNvPr>
-          <p:cNvSpPr>
-            <a:spLocks noGrp="1"/>
-          </p:cNvSpPr>
-          <p:nvPr>
-            <p:ph type="title"/>
-          </p:nvPr>
-        </p:nvSpPr>
-        <p:spPr/>
-        <p:txBody>
-          <a:bodyPr/>
-          <a:lstStyle/>
-          <a:p>
-            <a:r>
-              <a:rPr lang="en-US" dirty="0"/>
-              <a:t>Cross Attention</a:t>
-            </a:r>
-          </a:p>
-        </p:txBody>
-      </p:sp>
-    </p:spTree>
-    <p:extLst>
-      <p:ext uri="{BB962C8B-B14F-4D97-AF65-F5344CB8AC3E}">
-        <p14:creationId xmlns:p14="http://schemas.microsoft.com/office/powerpoint/2010/main" val="1038922087"/>
-      </p:ext>
-    </p:extLst>
-  </p:cSld>
-  <p:clrMapOvr>
-    <a:masterClrMapping/>
-  </p:clrMapOvr>
-</p:sld>
-</file>
-
-<file path=ppt/slides/slide5.xml><?xml version="1.0" encoding="utf-8"?>
-<p:sld xmlns:a="http://schemas.openxmlformats.org/drawingml/2006/main" xmlns:r="http://schemas.openxmlformats.org/officeDocument/2006/relationships" xmlns:p="http://schemas.openxmlformats.org/presentationml/2006/main">
-  <p:cSld>
-    <p:spTree>
-      <p:nvGrpSpPr>
-        <p:cNvPr id="1" name="">
-          <a:extLst>
-            <a:ext uri="{FF2B5EF4-FFF2-40B4-BE49-F238E27FC236}">
-              <a16:creationId xmlns:a16="http://schemas.microsoft.com/office/drawing/2014/main" id="{3D5E311C-50D5-AAE6-A470-30CB8C4D37EB}"/>
-            </a:ext>
-          </a:extLst>
-        </p:cNvPr>
-        <p:cNvGrpSpPr/>
-        <p:nvPr/>
-      </p:nvGrpSpPr>
-      <p:grpSpPr>
-        <a:xfrm>
-          <a:off x="0" y="0"/>
-          <a:ext cx="0" cy="0"/>
-          <a:chOff x="0" y="0"/>
-          <a:chExt cx="0" cy="0"/>
-        </a:xfrm>
-      </p:grpSpPr>
-      <p:sp>
-        <p:nvSpPr>
-          <p:cNvPr id="2" name="Title 1">
-            <a:extLst>
-              <a:ext uri="{FF2B5EF4-FFF2-40B4-BE49-F238E27FC236}">
-                <a16:creationId xmlns:a16="http://schemas.microsoft.com/office/drawing/2014/main" id="{41FDDCAF-F367-3ED9-624C-CB905E4CD6F7}"/>
-              </a:ext>
-            </a:extLst>
-          </p:cNvPr>
-          <p:cNvSpPr>
-            <a:spLocks noGrp="1"/>
-          </p:cNvSpPr>
-          <p:nvPr>
-            <p:ph type="title"/>
-          </p:nvPr>
-        </p:nvSpPr>
-        <p:spPr/>
-        <p:txBody>
-          <a:bodyPr/>
-          <a:lstStyle/>
-          <a:p>
-            <a:r>
-              <a:rPr lang="en-US" dirty="0"/>
-              <a:t>Approach</a:t>
-            </a:r>
-          </a:p>
-        </p:txBody>
-      </p:sp>
-      <p:sp>
-        <p:nvSpPr>
-          <p:cNvPr id="3" name="Content Placeholder 2">
-            <a:extLst>
-              <a:ext uri="{FF2B5EF4-FFF2-40B4-BE49-F238E27FC236}">
-                <a16:creationId xmlns:a16="http://schemas.microsoft.com/office/drawing/2014/main" id="{0BF794D7-AFF7-C928-66E2-90F44CFD52DB}"/>
-              </a:ext>
-            </a:extLst>
-          </p:cNvPr>
-          <p:cNvSpPr>
-            <a:spLocks noGrp="1"/>
-          </p:cNvSpPr>
-          <p:nvPr>
-            <p:ph idx="1"/>
-          </p:nvPr>
-        </p:nvSpPr>
-        <p:spPr/>
-        <p:txBody>
-          <a:bodyPr/>
-          <a:lstStyle/>
-          <a:p>
-            <a:pPr>
-              <a:buFont typeface="Arial" panose="020B0604020202020204" pitchFamily="34" charset="0"/>
-              <a:buChar char="•"/>
-            </a:pPr>
-            <a:r>
-              <a:rPr lang="en-US" dirty="0"/>
-              <a:t>Leveraging Named Entity Recognition (NER) for detecting sensitive entities</a:t>
-            </a:r>
-          </a:p>
-          <a:p>
-            <a:pPr>
-              <a:buFont typeface="Arial" panose="020B0604020202020204" pitchFamily="34" charset="0"/>
-              <a:buChar char="•"/>
-            </a:pPr>
-            <a:r>
-              <a:rPr lang="en-US" dirty="0"/>
-              <a:t>Employing Cross Attention Mechanism to link Personal entities to PII entities</a:t>
-            </a:r>
-          </a:p>
-          <a:p>
-            <a:pPr>
-              <a:buFont typeface="Arial" panose="020B0604020202020204" pitchFamily="34" charset="0"/>
-              <a:buChar char="•"/>
-            </a:pPr>
-            <a:r>
-              <a:rPr lang="en-US" dirty="0"/>
-              <a:t>Final classification to determine presence or absence of privacy violations</a:t>
-            </a:r>
-          </a:p>
-          <a:p>
-            <a:endParaRPr lang="en-US" dirty="0"/>
-          </a:p>
-        </p:txBody>
-      </p:sp>
-    </p:spTree>
-    <p:extLst>
-      <p:ext uri="{BB962C8B-B14F-4D97-AF65-F5344CB8AC3E}">
-        <p14:creationId xmlns:p14="http://schemas.microsoft.com/office/powerpoint/2010/main" val="618942123"/>
-      </p:ext>
-    </p:extLst>
-  </p:cSld>
-  <p:clrMapOvr>
-    <a:masterClrMapping/>
-  </p:clrMapOvr>
-</p:sld>
-</file>
-
-<file path=ppt/slides/slide6.xml><?xml version="1.0" encoding="utf-8"?>
-<p:sld xmlns:a="http://schemas.openxmlformats.org/drawingml/2006/main" xmlns:r="http://schemas.openxmlformats.org/officeDocument/2006/relationships" xmlns:p="http://schemas.openxmlformats.org/presentationml/2006/main">
-  <p:cSld>
-    <p:spTree>
-      <p:nvGrpSpPr>
-        <p:cNvPr id="1" name=""/>
-        <p:cNvGrpSpPr/>
-        <p:nvPr/>
-      </p:nvGrpSpPr>
-      <p:grpSpPr>
-        <a:xfrm>
-          <a:off x="0" y="0"/>
-          <a:ext cx="0" cy="0"/>
-          <a:chOff x="0" y="0"/>
-          <a:chExt cx="0" cy="0"/>
-        </a:xfrm>
-      </p:grpSpPr>
-      <p:sp>
-        <p:nvSpPr>
-          <p:cNvPr id="2" name="Title 1">
-            <a:extLst>
-              <a:ext uri="{FF2B5EF4-FFF2-40B4-BE49-F238E27FC236}">
-                <a16:creationId xmlns:a16="http://schemas.microsoft.com/office/drawing/2014/main" id="{AEBA3717-E326-8675-CB66-9FD419BD7A21}"/>
-              </a:ext>
-            </a:extLst>
-          </p:cNvPr>
-          <p:cNvSpPr>
-            <a:spLocks noGrp="1"/>
-          </p:cNvSpPr>
-          <p:nvPr>
-            <p:ph type="title"/>
-          </p:nvPr>
-        </p:nvSpPr>
-        <p:spPr/>
-        <p:txBody>
-          <a:bodyPr/>
-          <a:lstStyle/>
-          <a:p>
-            <a:r>
-              <a:rPr lang="en-US" dirty="0"/>
-              <a:t>Model Architecture</a:t>
-            </a:r>
-          </a:p>
-        </p:txBody>
-      </p:sp>
-      <p:sp>
-        <p:nvSpPr>
-          <p:cNvPr id="3" name="Content Placeholder 2">
-            <a:extLst>
-              <a:ext uri="{FF2B5EF4-FFF2-40B4-BE49-F238E27FC236}">
-                <a16:creationId xmlns:a16="http://schemas.microsoft.com/office/drawing/2014/main" id="{97CE80F4-C228-1930-FE7F-F71A9981104E}"/>
-              </a:ext>
-            </a:extLst>
-          </p:cNvPr>
-          <p:cNvSpPr>
-            <a:spLocks noGrp="1"/>
-          </p:cNvSpPr>
-          <p:nvPr>
-            <p:ph sz="half" idx="1"/>
-          </p:nvPr>
-        </p:nvSpPr>
-        <p:spPr/>
-        <p:txBody>
-          <a:bodyPr/>
-          <a:lstStyle/>
-          <a:p>
-            <a:pPr>
-              <a:buFont typeface="Arial" panose="020B0604020202020204" pitchFamily="34" charset="0"/>
-              <a:buChar char="•"/>
-            </a:pPr>
-            <a:r>
-              <a:rPr lang="en-US" dirty="0"/>
-              <a:t>Foundational Model for text embeddings</a:t>
-            </a:r>
-          </a:p>
-          <a:p>
-            <a:pPr>
-              <a:buFont typeface="Arial" panose="020B0604020202020204" pitchFamily="34" charset="0"/>
-              <a:buChar char="•"/>
-            </a:pPr>
-            <a:r>
-              <a:rPr lang="en-US" dirty="0"/>
-              <a:t>Separate NER heads for Personal and PII entities</a:t>
-            </a:r>
-          </a:p>
-          <a:p>
-            <a:pPr>
-              <a:buFont typeface="Arial" panose="020B0604020202020204" pitchFamily="34" charset="0"/>
-              <a:buChar char="•"/>
-            </a:pPr>
-            <a:r>
-              <a:rPr lang="en-US" dirty="0"/>
-              <a:t>Cross Attention linking Personal NER (queries) and PII NER (keys, values)</a:t>
-            </a:r>
-          </a:p>
-          <a:p>
-            <a:pPr>
-              <a:buFont typeface="Arial" panose="020B0604020202020204" pitchFamily="34" charset="0"/>
-              <a:buChar char="•"/>
-            </a:pPr>
-            <a:r>
-              <a:rPr lang="en-US" dirty="0"/>
-              <a:t>Final classifier layer</a:t>
-            </a:r>
-          </a:p>
-          <a:p>
-            <a:endParaRPr lang="en-US" dirty="0"/>
-          </a:p>
-        </p:txBody>
-      </p:sp>
-      <p:sp>
-        <p:nvSpPr>
-          <p:cNvPr id="4" name="Content Placeholder 3">
-            <a:extLst>
-              <a:ext uri="{FF2B5EF4-FFF2-40B4-BE49-F238E27FC236}">
-                <a16:creationId xmlns:a16="http://schemas.microsoft.com/office/drawing/2014/main" id="{A6D7E7B7-5428-5BA1-2EE9-F9D4539B986E}"/>
-              </a:ext>
-            </a:extLst>
-          </p:cNvPr>
-          <p:cNvSpPr>
-            <a:spLocks noGrp="1"/>
-          </p:cNvSpPr>
-          <p:nvPr>
-            <p:ph sz="half" idx="2"/>
-          </p:nvPr>
-        </p:nvSpPr>
-        <p:spPr/>
-        <p:txBody>
-          <a:bodyPr/>
-          <a:lstStyle/>
-          <a:p>
-            <a:endParaRPr lang="en-US"/>
-          </a:p>
-        </p:txBody>
-      </p:sp>
-    </p:spTree>
-    <p:extLst>
-      <p:ext uri="{BB962C8B-B14F-4D97-AF65-F5344CB8AC3E}">
-        <p14:creationId xmlns:p14="http://schemas.microsoft.com/office/powerpoint/2010/main" val="2528871441"/>
-      </p:ext>
-    </p:extLst>
-  </p:cSld>
-  <p:clrMapOvr>
-    <a:masterClrMapping/>
-  </p:clrMapOvr>
-</p:sld>
-</file>
-
 <file path=ppt/slides/slide7.xml><?xml version="1.0" encoding="utf-8"?>
 <p:sld xmlns:a="http://schemas.openxmlformats.org/drawingml/2006/main" xmlns:r="http://schemas.openxmlformats.org/officeDocument/2006/relationships" xmlns:p="http://schemas.openxmlformats.org/presentationml/2006/main">
   <p:cSld>
@@ -5962,7 +8079,7 @@
           <p:cNvPr id="2" name="Title 1">
             <a:extLst>
               <a:ext uri="{FF2B5EF4-FFF2-40B4-BE49-F238E27FC236}">
-                <a16:creationId xmlns:a16="http://schemas.microsoft.com/office/drawing/2014/main" id="{7E6C9FBE-6EE0-A6B3-5E02-E7E36BCC1A2B}"/>
+                <a16:creationId xmlns:a16="http://schemas.microsoft.com/office/drawing/2014/main" id="{1D370010-4DD1-88AD-0D6C-2CD02923105B}"/>
               </a:ext>
             </a:extLst>
           </p:cNvPr>
@@ -5980,73 +8097,44 @@
           <a:p>
             <a:r>
               <a:rPr lang="en-US" dirty="0"/>
-              <a:t>NER Attend to PII (Tutorial)</a:t>
-            </a:r>
-          </a:p>
-        </p:txBody>
-      </p:sp>
-      <p:sp>
-        <p:nvSpPr>
-          <p:cNvPr id="3" name="Content Placeholder 2">
-            <a:extLst>
-              <a:ext uri="{FF2B5EF4-FFF2-40B4-BE49-F238E27FC236}">
-                <a16:creationId xmlns:a16="http://schemas.microsoft.com/office/drawing/2014/main" id="{FAD5756D-D27E-3FB0-F5B2-B4EF470A97DC}"/>
-              </a:ext>
-            </a:extLst>
-          </p:cNvPr>
-          <p:cNvSpPr>
-            <a:spLocks noGrp="1"/>
-          </p:cNvSpPr>
+              <a:t>Training - Loss Curve</a:t>
+            </a:r>
+          </a:p>
+        </p:txBody>
+      </p:sp>
+      <p:pic>
+        <p:nvPicPr>
+          <p:cNvPr id="5" name="Content Placeholder 4" descr="A graph of training and validation loss&#10;&#10;AI-generated content may be incorrect.">
+            <a:extLst>
+              <a:ext uri="{FF2B5EF4-FFF2-40B4-BE49-F238E27FC236}">
+                <a16:creationId xmlns:a16="http://schemas.microsoft.com/office/drawing/2014/main" id="{920D1C98-4C49-1963-61A1-2E0E8BB1372A}"/>
+              </a:ext>
+            </a:extLst>
+          </p:cNvPr>
+          <p:cNvPicPr>
+            <a:picLocks noGrp="1" noChangeAspect="1"/>
+          </p:cNvPicPr>
           <p:nvPr>
             <p:ph idx="1"/>
           </p:nvPr>
-        </p:nvSpPr>
-        <p:spPr/>
-        <p:txBody>
-          <a:bodyPr/>
-          <a:lstStyle/>
-          <a:p>
-            <a:r>
-              <a:rPr lang="en-US" dirty="0"/>
-              <a:t>Input Text with NER Embeddings</a:t>
-            </a:r>
-          </a:p>
-          <a:p>
-            <a:r>
-              <a:rPr lang="en-US" dirty="0"/>
-              <a:t>NER Classifier</a:t>
-            </a:r>
-          </a:p>
-          <a:p>
-            <a:r>
-              <a:rPr lang="en-US" dirty="0"/>
-              <a:t>PII Classifier</a:t>
-            </a:r>
-          </a:p>
-          <a:p>
-            <a:r>
-              <a:rPr lang="en-US" dirty="0"/>
-              <a:t>Cross Attention</a:t>
-            </a:r>
-          </a:p>
-          <a:p>
-            <a:r>
-              <a:rPr lang="en-US" dirty="0"/>
-              <a:t>Privacy Classifier</a:t>
-            </a:r>
-          </a:p>
-          <a:p>
-            <a:r>
-              <a:rPr lang="en-US" dirty="0"/>
-              <a:t>Output</a:t>
-            </a:r>
-          </a:p>
-        </p:txBody>
-      </p:sp>
+        </p:nvPicPr>
+        <p:blipFill>
+          <a:blip r:embed="rId2"/>
+          <a:stretch>
+            <a:fillRect/>
+          </a:stretch>
+        </p:blipFill>
+        <p:spPr>
+          <a:xfrm>
+            <a:off x="3195108" y="1825625"/>
+            <a:ext cx="5801784" cy="4351338"/>
+          </a:xfrm>
+        </p:spPr>
+      </p:pic>
     </p:spTree>
     <p:extLst>
       <p:ext uri="{BB962C8B-B14F-4D97-AF65-F5344CB8AC3E}">
-        <p14:creationId xmlns:p14="http://schemas.microsoft.com/office/powerpoint/2010/main" val="3348950311"/>
+        <p14:creationId xmlns:p14="http://schemas.microsoft.com/office/powerpoint/2010/main" val="214863183"/>
       </p:ext>
     </p:extLst>
   </p:cSld>
@@ -6061,7 +8149,13 @@
   <p:cSld>
     <p:spTree>
       <p:nvGrpSpPr>
-        <p:cNvPr id="1" name=""/>
+        <p:cNvPr id="1" name="">
+          <a:extLst>
+            <a:ext uri="{FF2B5EF4-FFF2-40B4-BE49-F238E27FC236}">
+              <a16:creationId xmlns:a16="http://schemas.microsoft.com/office/drawing/2014/main" id="{BA252E96-940C-244E-F07D-2BBC574110EC}"/>
+            </a:ext>
+          </a:extLst>
+        </p:cNvPr>
         <p:cNvGrpSpPr/>
         <p:nvPr/>
       </p:nvGrpSpPr>
@@ -6078,7 +8172,7 @@
           <p:cNvPr id="2" name="Title 1">
             <a:extLst>
               <a:ext uri="{FF2B5EF4-FFF2-40B4-BE49-F238E27FC236}">
-                <a16:creationId xmlns:a16="http://schemas.microsoft.com/office/drawing/2014/main" id="{1D370010-4DD1-88AD-0D6C-2CD02923105B}"/>
+                <a16:creationId xmlns:a16="http://schemas.microsoft.com/office/drawing/2014/main" id="{CB655E7A-5503-F34B-B237-762C3F909212}"/>
               </a:ext>
             </a:extLst>
           </p:cNvPr>
@@ -6096,40 +8190,44 @@
           <a:p>
             <a:r>
               <a:rPr lang="en-US" dirty="0"/>
-              <a:t>Training (Loss computation)</a:t>
-            </a:r>
-          </a:p>
-        </p:txBody>
-      </p:sp>
-      <p:sp>
-        <p:nvSpPr>
-          <p:cNvPr id="3" name="Content Placeholder 2">
-            <a:extLst>
-              <a:ext uri="{FF2B5EF4-FFF2-40B4-BE49-F238E27FC236}">
-                <a16:creationId xmlns:a16="http://schemas.microsoft.com/office/drawing/2014/main" id="{D1D0C41B-4998-BE2A-9CCA-1D24806ADFF5}"/>
-              </a:ext>
-            </a:extLst>
-          </p:cNvPr>
-          <p:cNvSpPr>
-            <a:spLocks noGrp="1"/>
-          </p:cNvSpPr>
+              <a:t>Accuracy </a:t>
+            </a:r>
+          </a:p>
+        </p:txBody>
+      </p:sp>
+      <p:pic>
+        <p:nvPicPr>
+          <p:cNvPr id="7" name="Content Placeholder 6" descr="A graph showing the results of a training performance&#10;&#10;AI-generated content may be incorrect.">
+            <a:extLst>
+              <a:ext uri="{FF2B5EF4-FFF2-40B4-BE49-F238E27FC236}">
+                <a16:creationId xmlns:a16="http://schemas.microsoft.com/office/drawing/2014/main" id="{AA739C59-9BA0-589E-B49D-8EE8F7B27571}"/>
+              </a:ext>
+            </a:extLst>
+          </p:cNvPr>
+          <p:cNvPicPr>
+            <a:picLocks noGrp="1" noChangeAspect="1"/>
+          </p:cNvPicPr>
           <p:nvPr>
             <p:ph idx="1"/>
           </p:nvPr>
-        </p:nvSpPr>
-        <p:spPr/>
-        <p:txBody>
-          <a:bodyPr/>
-          <a:lstStyle/>
-          <a:p>
-            <a:endParaRPr lang="en-US"/>
-          </a:p>
-        </p:txBody>
-      </p:sp>
+        </p:nvPicPr>
+        <p:blipFill>
+          <a:blip r:embed="rId2"/>
+          <a:stretch>
+            <a:fillRect/>
+          </a:stretch>
+        </p:blipFill>
+        <p:spPr>
+          <a:xfrm>
+            <a:off x="2469885" y="1825625"/>
+            <a:ext cx="7252230" cy="4351338"/>
+          </a:xfrm>
+        </p:spPr>
+      </p:pic>
     </p:spTree>
     <p:extLst>
       <p:ext uri="{BB962C8B-B14F-4D97-AF65-F5344CB8AC3E}">
-        <p14:creationId xmlns:p14="http://schemas.microsoft.com/office/powerpoint/2010/main" val="214863183"/>
+        <p14:creationId xmlns:p14="http://schemas.microsoft.com/office/powerpoint/2010/main" val="3755294297"/>
       </p:ext>
     </p:extLst>
   </p:cSld>
@@ -6603,4 +8701,319 @@
     </a:ext>
   </a:extLst>
 </a:theme>
+</file>
+
+<file path=ppt/theme/theme2.xml><?xml version="1.0" encoding="utf-8"?>
+<a:theme xmlns:a="http://schemas.openxmlformats.org/drawingml/2006/main" name="Office Theme">
+  <a:themeElements>
+    <a:clrScheme name="Office">
+      <a:dk1>
+        <a:sysClr val="windowText" lastClr="000000"/>
+      </a:dk1>
+      <a:lt1>
+        <a:sysClr val="window" lastClr="FFFFFF"/>
+      </a:lt1>
+      <a:dk2>
+        <a:srgbClr val="0E2841"/>
+      </a:dk2>
+      <a:lt2>
+        <a:srgbClr val="E8E8E8"/>
+      </a:lt2>
+      <a:accent1>
+        <a:srgbClr val="156082"/>
+      </a:accent1>
+      <a:accent2>
+        <a:srgbClr val="E97132"/>
+      </a:accent2>
+      <a:accent3>
+        <a:srgbClr val="196B24"/>
+      </a:accent3>
+      <a:accent4>
+        <a:srgbClr val="0F9ED5"/>
+      </a:accent4>
+      <a:accent5>
+        <a:srgbClr val="A02B93"/>
+      </a:accent5>
+      <a:accent6>
+        <a:srgbClr val="4EA72E"/>
+      </a:accent6>
+      <a:hlink>
+        <a:srgbClr val="467886"/>
+      </a:hlink>
+      <a:folHlink>
+        <a:srgbClr val="96607D"/>
+      </a:folHlink>
+    </a:clrScheme>
+    <a:fontScheme name="Office">
+      <a:majorFont>
+        <a:latin typeface="Aptos Display" panose="02110004020202020204"/>
+        <a:ea typeface=""/>
+        <a:cs typeface=""/>
+        <a:font script="Jpan" typeface="游ゴシック Light"/>
+        <a:font script="Hang" typeface="맑은 고딕"/>
+        <a:font script="Hans" typeface="等线 Light"/>
+        <a:font script="Hant" typeface="新細明體"/>
+        <a:font script="Arab" typeface="Times New Roman"/>
+        <a:font script="Hebr" typeface="Times New Roman"/>
+        <a:font script="Thai" typeface="Angsana New"/>
+        <a:font script="Ethi" typeface="Nyala"/>
+        <a:font script="Beng" typeface="Vrinda"/>
+        <a:font script="Gujr" typeface="Shruti"/>
+        <a:font script="Khmr" typeface="MoolBoran"/>
+        <a:font script="Knda" typeface="Tunga"/>
+        <a:font script="Guru" typeface="Raavi"/>
+        <a:font script="Cans" typeface="Euphemia"/>
+        <a:font script="Cher" typeface="Plantagenet Cherokee"/>
+        <a:font script="Yiii" typeface="Microsoft Yi Baiti"/>
+        <a:font script="Tibt" typeface="Microsoft Himalaya"/>
+        <a:font script="Thaa" typeface="MV Boli"/>
+        <a:font script="Deva" typeface="Mangal"/>
+        <a:font script="Telu" typeface="Gautami"/>
+        <a:font script="Taml" typeface="Latha"/>
+        <a:font script="Syrc" typeface="Estrangelo Edessa"/>
+        <a:font script="Orya" typeface="Kalinga"/>
+        <a:font script="Mlym" typeface="Kartika"/>
+        <a:font script="Laoo" typeface="DokChampa"/>
+        <a:font script="Sinh" typeface="Iskoola Pota"/>
+        <a:font script="Mong" typeface="Mongolian Baiti"/>
+        <a:font script="Viet" typeface="Times New Roman"/>
+        <a:font script="Uigh" typeface="Microsoft Uighur"/>
+        <a:font script="Geor" typeface="Sylfaen"/>
+        <a:font script="Armn" typeface="Arial"/>
+        <a:font script="Bugi" typeface="Leelawadee UI"/>
+        <a:font script="Bopo" typeface="Microsoft JhengHei"/>
+        <a:font script="Java" typeface="Javanese Text"/>
+        <a:font script="Lisu" typeface="Segoe UI"/>
+        <a:font script="Mymr" typeface="Myanmar Text"/>
+        <a:font script="Nkoo" typeface="Ebrima"/>
+        <a:font script="Olck" typeface="Nirmala UI"/>
+        <a:font script="Osma" typeface="Ebrima"/>
+        <a:font script="Phag" typeface="Phagspa"/>
+        <a:font script="Syrn" typeface="Estrangelo Edessa"/>
+        <a:font script="Syrj" typeface="Estrangelo Edessa"/>
+        <a:font script="Syre" typeface="Estrangelo Edessa"/>
+        <a:font script="Sora" typeface="Nirmala UI"/>
+        <a:font script="Tale" typeface="Microsoft Tai Le"/>
+        <a:font script="Talu" typeface="Microsoft New Tai Lue"/>
+        <a:font script="Tfng" typeface="Ebrima"/>
+      </a:majorFont>
+      <a:minorFont>
+        <a:latin typeface="Aptos" panose="02110004020202020204"/>
+        <a:ea typeface=""/>
+        <a:cs typeface=""/>
+        <a:font script="Jpan" typeface="游ゴシック"/>
+        <a:font script="Hang" typeface="맑은 고딕"/>
+        <a:font script="Hans" typeface="等线"/>
+        <a:font script="Hant" typeface="新細明體"/>
+        <a:font script="Arab" typeface="Arial"/>
+        <a:font script="Hebr" typeface="Arial"/>
+        <a:font script="Thai" typeface="Cordia New"/>
+        <a:font script="Ethi" typeface="Nyala"/>
+        <a:font script="Beng" typeface="Vrinda"/>
+        <a:font script="Gujr" typeface="Shruti"/>
+        <a:font script="Khmr" typeface="DaunPenh"/>
+        <a:font script="Knda" typeface="Tunga"/>
+        <a:font script="Guru" typeface="Raavi"/>
+        <a:font script="Cans" typeface="Euphemia"/>
+        <a:font script="Cher" typeface="Plantagenet Cherokee"/>
+        <a:font script="Yiii" typeface="Microsoft Yi Baiti"/>
+        <a:font script="Tibt" typeface="Microsoft Himalaya"/>
+        <a:font script="Thaa" typeface="MV Boli"/>
+        <a:font script="Deva" typeface="Mangal"/>
+        <a:font script="Telu" typeface="Gautami"/>
+        <a:font script="Taml" typeface="Latha"/>
+        <a:font script="Syrc" typeface="Estrangelo Edessa"/>
+        <a:font script="Orya" typeface="Kalinga"/>
+        <a:font script="Mlym" typeface="Kartika"/>
+        <a:font script="Laoo" typeface="DokChampa"/>
+        <a:font script="Sinh" typeface="Iskoola Pota"/>
+        <a:font script="Mong" typeface="Mongolian Baiti"/>
+        <a:font script="Viet" typeface="Arial"/>
+        <a:font script="Uigh" typeface="Microsoft Uighur"/>
+        <a:font script="Geor" typeface="Sylfaen"/>
+        <a:font script="Armn" typeface="Arial"/>
+        <a:font script="Bugi" typeface="Leelawadee UI"/>
+        <a:font script="Bopo" typeface="Microsoft JhengHei"/>
+        <a:font script="Java" typeface="Javanese Text"/>
+        <a:font script="Lisu" typeface="Segoe UI"/>
+        <a:font script="Mymr" typeface="Myanmar Text"/>
+        <a:font script="Nkoo" typeface="Ebrima"/>
+        <a:font script="Olck" typeface="Nirmala UI"/>
+        <a:font script="Osma" typeface="Ebrima"/>
+        <a:font script="Phag" typeface="Phagspa"/>
+        <a:font script="Syrn" typeface="Estrangelo Edessa"/>
+        <a:font script="Syrj" typeface="Estrangelo Edessa"/>
+        <a:font script="Syre" typeface="Estrangelo Edessa"/>
+        <a:font script="Sora" typeface="Nirmala UI"/>
+        <a:font script="Tale" typeface="Microsoft Tai Le"/>
+        <a:font script="Talu" typeface="Microsoft New Tai Lue"/>
+        <a:font script="Tfng" typeface="Ebrima"/>
+      </a:minorFont>
+    </a:fontScheme>
+    <a:fmtScheme name="Office">
+      <a:fillStyleLst>
+        <a:solidFill>
+          <a:schemeClr val="phClr"/>
+        </a:solidFill>
+        <a:gradFill rotWithShape="1">
+          <a:gsLst>
+            <a:gs pos="0">
+              <a:schemeClr val="phClr">
+                <a:lumMod val="110000"/>
+                <a:satMod val="105000"/>
+                <a:tint val="67000"/>
+              </a:schemeClr>
+            </a:gs>
+            <a:gs pos="50000">
+              <a:schemeClr val="phClr">
+                <a:lumMod val="105000"/>
+                <a:satMod val="103000"/>
+                <a:tint val="73000"/>
+              </a:schemeClr>
+            </a:gs>
+            <a:gs pos="100000">
+              <a:schemeClr val="phClr">
+                <a:lumMod val="105000"/>
+                <a:satMod val="109000"/>
+                <a:tint val="81000"/>
+              </a:schemeClr>
+            </a:gs>
+          </a:gsLst>
+          <a:lin ang="5400000" scaled="0"/>
+        </a:gradFill>
+        <a:gradFill rotWithShape="1">
+          <a:gsLst>
+            <a:gs pos="0">
+              <a:schemeClr val="phClr">
+                <a:satMod val="103000"/>
+                <a:lumMod val="102000"/>
+                <a:tint val="94000"/>
+              </a:schemeClr>
+            </a:gs>
+            <a:gs pos="50000">
+              <a:schemeClr val="phClr">
+                <a:satMod val="110000"/>
+                <a:lumMod val="100000"/>
+                <a:shade val="100000"/>
+              </a:schemeClr>
+            </a:gs>
+            <a:gs pos="100000">
+              <a:schemeClr val="phClr">
+                <a:lumMod val="99000"/>
+                <a:satMod val="120000"/>
+                <a:shade val="78000"/>
+              </a:schemeClr>
+            </a:gs>
+          </a:gsLst>
+          <a:lin ang="5400000" scaled="0"/>
+        </a:gradFill>
+      </a:fillStyleLst>
+      <a:lnStyleLst>
+        <a:ln w="12700" cap="flat" cmpd="sng" algn="ctr">
+          <a:solidFill>
+            <a:schemeClr val="phClr"/>
+          </a:solidFill>
+          <a:prstDash val="solid"/>
+          <a:miter lim="800000"/>
+        </a:ln>
+        <a:ln w="19050" cap="flat" cmpd="sng" algn="ctr">
+          <a:solidFill>
+            <a:schemeClr val="phClr"/>
+          </a:solidFill>
+          <a:prstDash val="solid"/>
+          <a:miter lim="800000"/>
+        </a:ln>
+        <a:ln w="25400" cap="flat" cmpd="sng" algn="ctr">
+          <a:solidFill>
+            <a:schemeClr val="phClr"/>
+          </a:solidFill>
+          <a:prstDash val="solid"/>
+          <a:miter lim="800000"/>
+        </a:ln>
+      </a:lnStyleLst>
+      <a:effectStyleLst>
+        <a:effectStyle>
+          <a:effectLst/>
+        </a:effectStyle>
+        <a:effectStyle>
+          <a:effectLst/>
+        </a:effectStyle>
+        <a:effectStyle>
+          <a:effectLst>
+            <a:outerShdw blurRad="57150" dist="19050" dir="5400000" algn="ctr" rotWithShape="0">
+              <a:srgbClr val="000000">
+                <a:alpha val="63000"/>
+              </a:srgbClr>
+            </a:outerShdw>
+          </a:effectLst>
+        </a:effectStyle>
+      </a:effectStyleLst>
+      <a:bgFillStyleLst>
+        <a:solidFill>
+          <a:schemeClr val="phClr"/>
+        </a:solidFill>
+        <a:solidFill>
+          <a:schemeClr val="phClr">
+            <a:tint val="95000"/>
+            <a:satMod val="170000"/>
+          </a:schemeClr>
+        </a:solidFill>
+        <a:gradFill rotWithShape="1">
+          <a:gsLst>
+            <a:gs pos="0">
+              <a:schemeClr val="phClr">
+                <a:tint val="93000"/>
+                <a:satMod val="150000"/>
+                <a:shade val="98000"/>
+                <a:lumMod val="102000"/>
+              </a:schemeClr>
+            </a:gs>
+            <a:gs pos="50000">
+              <a:schemeClr val="phClr">
+                <a:tint val="98000"/>
+                <a:satMod val="130000"/>
+                <a:shade val="90000"/>
+                <a:lumMod val="103000"/>
+              </a:schemeClr>
+            </a:gs>
+            <a:gs pos="100000">
+              <a:schemeClr val="phClr">
+                <a:shade val="63000"/>
+                <a:satMod val="120000"/>
+              </a:schemeClr>
+            </a:gs>
+          </a:gsLst>
+          <a:lin ang="5400000" scaled="0"/>
+        </a:gradFill>
+      </a:bgFillStyleLst>
+    </a:fmtScheme>
+  </a:themeElements>
+  <a:objectDefaults>
+    <a:lnDef>
+      <a:spPr/>
+      <a:bodyPr/>
+      <a:lstStyle/>
+      <a:style>
+        <a:lnRef idx="2">
+          <a:schemeClr val="accent1"/>
+        </a:lnRef>
+        <a:fillRef idx="0">
+          <a:schemeClr val="accent1"/>
+        </a:fillRef>
+        <a:effectRef idx="1">
+          <a:schemeClr val="accent1"/>
+        </a:effectRef>
+        <a:fontRef idx="minor">
+          <a:schemeClr val="tx1"/>
+        </a:fontRef>
+      </a:style>
+    </a:lnDef>
+  </a:objectDefaults>
+  <a:extraClrSchemeLst/>
+  <a:extLst>
+    <a:ext uri="{05A4C25C-085E-4340-85A3-A5531E510DB2}">
+      <thm15:themeFamily xmlns:thm15="http://schemas.microsoft.com/office/thememl/2012/main" name="Office Theme" id="{2E142A2C-CD16-42D6-873A-C26D2A0506FA}" vid="{1BDDFF52-6CD6-40A5-AB3C-68EB2F1E4D0A}"/>
+    </a:ext>
+  </a:extLst>
+</a:theme>
 </file>